--- a/public/双星问题.pptx
+++ b/public/双星问题.pptx
@@ -18185,6 +18185,188 @@
                                           </p:stCondLst>
                                         </p:cTn>
                                         <p:tgtEl>
+                                          <p:spTgt spid="20"/>
+                                        </p:tgtEl>
+                                        <p:attrNameLst>
+                                          <p:attrName>style.visibility</p:attrName>
+                                        </p:attrNameLst>
+                                      </p:cBhvr>
+                                      <p:to>
+                                        <p:strVal val="visible"/>
+                                      </p:to>
+                                    </p:set>
+                                    <p:anim calcmode="lin" valueType="num">
+                                      <p:cBhvr additive="base">
+                                        <p:cTn id="19" dur="500" fill="hold"/>
+                                        <p:tgtEl>
+                                          <p:spTgt spid="20"/>
+                                        </p:tgtEl>
+                                        <p:attrNameLst>
+                                          <p:attrName>ppt_x</p:attrName>
+                                        </p:attrNameLst>
+                                      </p:cBhvr>
+                                      <p:tavLst>
+                                        <p:tav tm="0">
+                                          <p:val>
+                                            <p:strVal val="#ppt_x"/>
+                                          </p:val>
+                                        </p:tav>
+                                        <p:tav tm="100000">
+                                          <p:val>
+                                            <p:strVal val="#ppt_x"/>
+                                          </p:val>
+                                        </p:tav>
+                                      </p:tavLst>
+                                    </p:anim>
+                                    <p:anim calcmode="lin" valueType="num">
+                                      <p:cBhvr additive="base">
+                                        <p:cTn id="20" dur="500" fill="hold"/>
+                                        <p:tgtEl>
+                                          <p:spTgt spid="20"/>
+                                        </p:tgtEl>
+                                        <p:attrNameLst>
+                                          <p:attrName>ppt_y</p:attrName>
+                                        </p:attrNameLst>
+                                      </p:cBhvr>
+                                      <p:tavLst>
+                                        <p:tav tm="0">
+                                          <p:val>
+                                            <p:strVal val="1+#ppt_h/2"/>
+                                          </p:val>
+                                        </p:tav>
+                                        <p:tav tm="100000">
+                                          <p:val>
+                                            <p:strVal val="#ppt_y"/>
+                                          </p:val>
+                                        </p:tav>
+                                      </p:tavLst>
+                                    </p:anim>
+                                  </p:childTnLst>
+                                </p:cTn>
+                              </p:par>
+                            </p:childTnLst>
+                          </p:cTn>
+                        </p:par>
+                      </p:childTnLst>
+                    </p:cTn>
+                  </p:par>
+                  <p:par>
+                    <p:cTn id="21" fill="hold">
+                      <p:stCondLst>
+                        <p:cond delay="indefinite"/>
+                      </p:stCondLst>
+                      <p:childTnLst>
+                        <p:par>
+                          <p:cTn id="22" fill="hold">
+                            <p:stCondLst>
+                              <p:cond delay="0"/>
+                            </p:stCondLst>
+                            <p:childTnLst>
+                              <p:par>
+                                <p:cTn id="23" presetID="2" presetClass="entr" presetSubtype="4" fill="hold" grpId="0" nodeType="clickEffect">
+                                  <p:stCondLst>
+                                    <p:cond delay="0"/>
+                                  </p:stCondLst>
+                                  <p:childTnLst>
+                                    <p:set>
+                                      <p:cBhvr>
+                                        <p:cTn id="24" dur="1" fill="hold">
+                                          <p:stCondLst>
+                                            <p:cond delay="0"/>
+                                          </p:stCondLst>
+                                        </p:cTn>
+                                        <p:tgtEl>
+                                          <p:spTgt spid="38916"/>
+                                        </p:tgtEl>
+                                        <p:attrNameLst>
+                                          <p:attrName>style.visibility</p:attrName>
+                                        </p:attrNameLst>
+                                      </p:cBhvr>
+                                      <p:to>
+                                        <p:strVal val="visible"/>
+                                      </p:to>
+                                    </p:set>
+                                    <p:anim calcmode="lin" valueType="num">
+                                      <p:cBhvr additive="base">
+                                        <p:cTn id="25" dur="500" fill="hold"/>
+                                        <p:tgtEl>
+                                          <p:spTgt spid="38916"/>
+                                        </p:tgtEl>
+                                        <p:attrNameLst>
+                                          <p:attrName>ppt_x</p:attrName>
+                                        </p:attrNameLst>
+                                      </p:cBhvr>
+                                      <p:tavLst>
+                                        <p:tav tm="0">
+                                          <p:val>
+                                            <p:strVal val="#ppt_x"/>
+                                          </p:val>
+                                        </p:tav>
+                                        <p:tav tm="100000">
+                                          <p:val>
+                                            <p:strVal val="#ppt_x"/>
+                                          </p:val>
+                                        </p:tav>
+                                      </p:tavLst>
+                                    </p:anim>
+                                    <p:anim calcmode="lin" valueType="num">
+                                      <p:cBhvr additive="base">
+                                        <p:cTn id="26" dur="500" fill="hold"/>
+                                        <p:tgtEl>
+                                          <p:spTgt spid="38916"/>
+                                        </p:tgtEl>
+                                        <p:attrNameLst>
+                                          <p:attrName>ppt_y</p:attrName>
+                                        </p:attrNameLst>
+                                      </p:cBhvr>
+                                      <p:tavLst>
+                                        <p:tav tm="0">
+                                          <p:val>
+                                            <p:strVal val="1+#ppt_h/2"/>
+                                          </p:val>
+                                        </p:tav>
+                                        <p:tav tm="100000">
+                                          <p:val>
+                                            <p:strVal val="#ppt_y"/>
+                                          </p:val>
+                                        </p:tav>
+                                      </p:tavLst>
+                                    </p:anim>
+                                  </p:childTnLst>
+                                </p:cTn>
+                              </p:par>
+                            </p:childTnLst>
+                          </p:cTn>
+                        </p:par>
+                      </p:childTnLst>
+                    </p:cTn>
+                  </p:par>
+                  <p:par>
+                    <p:cTn id="27" fill="hold">
+                      <p:stCondLst>
+                        <p:cond delay="indefinite"/>
+                      </p:stCondLst>
+                      <p:childTnLst>
+                        <p:par>
+                          <p:cTn id="28" fill="hold">
+                            <p:stCondLst>
+                              <p:cond delay="0"/>
+                            </p:stCondLst>
+                            <p:childTnLst>
+                              <p:par>
+                                <p:cTn id="29" presetID="2" presetClass="entr" presetSubtype="4" fill="hold" grpId="0" nodeType="clickEffect">
+                                  <p:stCondLst>
+                                    <p:cond delay="0"/>
+                                  </p:stCondLst>
+                                  <p:childTnLst>
+                                    <p:set>
+                                      <p:cBhvr>
+                                        <p:cTn id="30" dur="1" fill="hold">
+                                          <p:stCondLst>
+                                            <p:cond delay="0"/>
+                                          </p:stCondLst>
+                                        </p:cTn>
+                                        <p:tgtEl>
                                           <p:spTgt spid="38917"/>
                                         </p:tgtEl>
                                         <p:attrNameLst>
@@ -18197,7 +18379,7 @@
                                     </p:set>
                                     <p:anim calcmode="lin" valueType="num">
                                       <p:cBhvr additive="base">
-                                        <p:cTn id="19" dur="500" fill="hold"/>
+                                        <p:cTn id="31" dur="500" fill="hold"/>
                                         <p:tgtEl>
                                           <p:spTgt spid="38917"/>
                                         </p:tgtEl>
@@ -18220,9 +18402,683 @@
                                     </p:anim>
                                     <p:anim calcmode="lin" valueType="num">
                                       <p:cBhvr additive="base">
-                                        <p:cTn id="20" dur="500" fill="hold"/>
+                                        <p:cTn id="32" dur="500" fill="hold"/>
                                         <p:tgtEl>
                                           <p:spTgt spid="38917"/>
+                                        </p:tgtEl>
+                                        <p:attrNameLst>
+                                          <p:attrName>ppt_y</p:attrName>
+                                        </p:attrNameLst>
+                                      </p:cBhvr>
+                                      <p:tavLst>
+                                        <p:tav tm="0">
+                                          <p:val>
+                                            <p:strVal val="1+#ppt_h/2"/>
+                                          </p:val>
+                                        </p:tav>
+                                        <p:tav tm="100000">
+                                          <p:val>
+                                            <p:strVal val="#ppt_y"/>
+                                          </p:val>
+                                        </p:tav>
+                                      </p:tavLst>
+                                    </p:anim>
+                                  </p:childTnLst>
+                                </p:cTn>
+                              </p:par>
+                            </p:childTnLst>
+                          </p:cTn>
+                        </p:par>
+                      </p:childTnLst>
+                    </p:cTn>
+                  </p:par>
+                  <p:par>
+                    <p:cTn id="33" fill="hold">
+                      <p:stCondLst>
+                        <p:cond delay="indefinite"/>
+                      </p:stCondLst>
+                      <p:childTnLst>
+                        <p:par>
+                          <p:cTn id="34" fill="hold">
+                            <p:stCondLst>
+                              <p:cond delay="0"/>
+                            </p:stCondLst>
+                            <p:childTnLst>
+                              <p:par>
+                                <p:cTn id="35" presetID="2" presetClass="entr" presetSubtype="4" fill="hold" grpId="0" nodeType="clickEffect">
+                                  <p:stCondLst>
+                                    <p:cond delay="0"/>
+                                  </p:stCondLst>
+                                  <p:childTnLst>
+                                    <p:set>
+                                      <p:cBhvr>
+                                        <p:cTn id="36" dur="1" fill="hold">
+                                          <p:stCondLst>
+                                            <p:cond delay="0"/>
+                                          </p:stCondLst>
+                                        </p:cTn>
+                                        <p:tgtEl>
+                                          <p:spTgt spid="38915"/>
+                                        </p:tgtEl>
+                                        <p:attrNameLst>
+                                          <p:attrName>style.visibility</p:attrName>
+                                        </p:attrNameLst>
+                                      </p:cBhvr>
+                                      <p:to>
+                                        <p:strVal val="visible"/>
+                                      </p:to>
+                                    </p:set>
+                                    <p:anim calcmode="lin" valueType="num">
+                                      <p:cBhvr additive="base">
+                                        <p:cTn id="37" dur="500" fill="hold"/>
+                                        <p:tgtEl>
+                                          <p:spTgt spid="38915"/>
+                                        </p:tgtEl>
+                                        <p:attrNameLst>
+                                          <p:attrName>ppt_x</p:attrName>
+                                        </p:attrNameLst>
+                                      </p:cBhvr>
+                                      <p:tavLst>
+                                        <p:tav tm="0">
+                                          <p:val>
+                                            <p:strVal val="#ppt_x"/>
+                                          </p:val>
+                                        </p:tav>
+                                        <p:tav tm="100000">
+                                          <p:val>
+                                            <p:strVal val="#ppt_x"/>
+                                          </p:val>
+                                        </p:tav>
+                                      </p:tavLst>
+                                    </p:anim>
+                                    <p:anim calcmode="lin" valueType="num">
+                                      <p:cBhvr additive="base">
+                                        <p:cTn id="38" dur="500" fill="hold"/>
+                                        <p:tgtEl>
+                                          <p:spTgt spid="38915"/>
+                                        </p:tgtEl>
+                                        <p:attrNameLst>
+                                          <p:attrName>ppt_y</p:attrName>
+                                        </p:attrNameLst>
+                                      </p:cBhvr>
+                                      <p:tavLst>
+                                        <p:tav tm="0">
+                                          <p:val>
+                                            <p:strVal val="1+#ppt_h/2"/>
+                                          </p:val>
+                                        </p:tav>
+                                        <p:tav tm="100000">
+                                          <p:val>
+                                            <p:strVal val="#ppt_y"/>
+                                          </p:val>
+                                        </p:tav>
+                                      </p:tavLst>
+                                    </p:anim>
+                                  </p:childTnLst>
+                                </p:cTn>
+                              </p:par>
+                            </p:childTnLst>
+                          </p:cTn>
+                        </p:par>
+                      </p:childTnLst>
+                    </p:cTn>
+                  </p:par>
+                  <p:par>
+                    <p:cTn id="39" fill="hold">
+                      <p:stCondLst>
+                        <p:cond delay="indefinite"/>
+                      </p:stCondLst>
+                      <p:childTnLst>
+                        <p:par>
+                          <p:cTn id="40" fill="hold">
+                            <p:stCondLst>
+                              <p:cond delay="0"/>
+                            </p:stCondLst>
+                            <p:childTnLst>
+                              <p:par>
+                                <p:cTn id="41" presetID="2" presetClass="entr" presetSubtype="4" fill="hold" grpId="0" nodeType="clickEffect">
+                                  <p:stCondLst>
+                                    <p:cond delay="0"/>
+                                  </p:stCondLst>
+                                  <p:childTnLst>
+                                    <p:set>
+                                      <p:cBhvr>
+                                        <p:cTn id="42" dur="1" fill="hold">
+                                          <p:stCondLst>
+                                            <p:cond delay="0"/>
+                                          </p:stCondLst>
+                                        </p:cTn>
+                                        <p:tgtEl>
+                                          <p:spTgt spid="22"/>
+                                        </p:tgtEl>
+                                        <p:attrNameLst>
+                                          <p:attrName>style.visibility</p:attrName>
+                                        </p:attrNameLst>
+                                      </p:cBhvr>
+                                      <p:to>
+                                        <p:strVal val="visible"/>
+                                      </p:to>
+                                    </p:set>
+                                    <p:anim calcmode="lin" valueType="num">
+                                      <p:cBhvr additive="base">
+                                        <p:cTn id="43" dur="500" fill="hold"/>
+                                        <p:tgtEl>
+                                          <p:spTgt spid="22"/>
+                                        </p:tgtEl>
+                                        <p:attrNameLst>
+                                          <p:attrName>ppt_x</p:attrName>
+                                        </p:attrNameLst>
+                                      </p:cBhvr>
+                                      <p:tavLst>
+                                        <p:tav tm="0">
+                                          <p:val>
+                                            <p:strVal val="#ppt_x"/>
+                                          </p:val>
+                                        </p:tav>
+                                        <p:tav tm="100000">
+                                          <p:val>
+                                            <p:strVal val="#ppt_x"/>
+                                          </p:val>
+                                        </p:tav>
+                                      </p:tavLst>
+                                    </p:anim>
+                                    <p:anim calcmode="lin" valueType="num">
+                                      <p:cBhvr additive="base">
+                                        <p:cTn id="44" dur="500" fill="hold"/>
+                                        <p:tgtEl>
+                                          <p:spTgt spid="22"/>
+                                        </p:tgtEl>
+                                        <p:attrNameLst>
+                                          <p:attrName>ppt_y</p:attrName>
+                                        </p:attrNameLst>
+                                      </p:cBhvr>
+                                      <p:tavLst>
+                                        <p:tav tm="0">
+                                          <p:val>
+                                            <p:strVal val="1+#ppt_h/2"/>
+                                          </p:val>
+                                        </p:tav>
+                                        <p:tav tm="100000">
+                                          <p:val>
+                                            <p:strVal val="#ppt_y"/>
+                                          </p:val>
+                                        </p:tav>
+                                      </p:tavLst>
+                                    </p:anim>
+                                  </p:childTnLst>
+                                </p:cTn>
+                              </p:par>
+                              <p:par>
+                                <p:cTn id="45" presetID="2" presetClass="entr" presetSubtype="4" fill="hold" grpId="0" nodeType="withEffect">
+                                  <p:stCondLst>
+                                    <p:cond delay="0"/>
+                                  </p:stCondLst>
+                                  <p:childTnLst>
+                                    <p:set>
+                                      <p:cBhvr>
+                                        <p:cTn id="46" dur="1" fill="hold">
+                                          <p:stCondLst>
+                                            <p:cond delay="0"/>
+                                          </p:stCondLst>
+                                        </p:cTn>
+                                        <p:tgtEl>
+                                          <p:spTgt spid="38920"/>
+                                        </p:tgtEl>
+                                        <p:attrNameLst>
+                                          <p:attrName>style.visibility</p:attrName>
+                                        </p:attrNameLst>
+                                      </p:cBhvr>
+                                      <p:to>
+                                        <p:strVal val="visible"/>
+                                      </p:to>
+                                    </p:set>
+                                    <p:anim calcmode="lin" valueType="num">
+                                      <p:cBhvr additive="base">
+                                        <p:cTn id="47" dur="500" fill="hold"/>
+                                        <p:tgtEl>
+                                          <p:spTgt spid="38920"/>
+                                        </p:tgtEl>
+                                        <p:attrNameLst>
+                                          <p:attrName>ppt_x</p:attrName>
+                                        </p:attrNameLst>
+                                      </p:cBhvr>
+                                      <p:tavLst>
+                                        <p:tav tm="0">
+                                          <p:val>
+                                            <p:strVal val="#ppt_x"/>
+                                          </p:val>
+                                        </p:tav>
+                                        <p:tav tm="100000">
+                                          <p:val>
+                                            <p:strVal val="#ppt_x"/>
+                                          </p:val>
+                                        </p:tav>
+                                      </p:tavLst>
+                                    </p:anim>
+                                    <p:anim calcmode="lin" valueType="num">
+                                      <p:cBhvr additive="base">
+                                        <p:cTn id="48" dur="500" fill="hold"/>
+                                        <p:tgtEl>
+                                          <p:spTgt spid="38920"/>
+                                        </p:tgtEl>
+                                        <p:attrNameLst>
+                                          <p:attrName>ppt_y</p:attrName>
+                                        </p:attrNameLst>
+                                      </p:cBhvr>
+                                      <p:tavLst>
+                                        <p:tav tm="0">
+                                          <p:val>
+                                            <p:strVal val="1+#ppt_h/2"/>
+                                          </p:val>
+                                        </p:tav>
+                                        <p:tav tm="100000">
+                                          <p:val>
+                                            <p:strVal val="#ppt_y"/>
+                                          </p:val>
+                                        </p:tav>
+                                      </p:tavLst>
+                                    </p:anim>
+                                  </p:childTnLst>
+                                </p:cTn>
+                              </p:par>
+                            </p:childTnLst>
+                          </p:cTn>
+                        </p:par>
+                      </p:childTnLst>
+                    </p:cTn>
+                  </p:par>
+                  <p:par>
+                    <p:cTn id="49" fill="hold">
+                      <p:stCondLst>
+                        <p:cond delay="indefinite"/>
+                      </p:stCondLst>
+                      <p:childTnLst>
+                        <p:par>
+                          <p:cTn id="50" fill="hold">
+                            <p:stCondLst>
+                              <p:cond delay="0"/>
+                            </p:stCondLst>
+                            <p:childTnLst>
+                              <p:par>
+                                <p:cTn id="51" presetID="2" presetClass="entr" presetSubtype="4" fill="hold" grpId="0" nodeType="clickEffect">
+                                  <p:stCondLst>
+                                    <p:cond delay="0"/>
+                                  </p:stCondLst>
+                                  <p:childTnLst>
+                                    <p:set>
+                                      <p:cBhvr>
+                                        <p:cTn id="52" dur="1" fill="hold">
+                                          <p:stCondLst>
+                                            <p:cond delay="0"/>
+                                          </p:stCondLst>
+                                        </p:cTn>
+                                        <p:tgtEl>
+                                          <p:spTgt spid="11"/>
+                                        </p:tgtEl>
+                                        <p:attrNameLst>
+                                          <p:attrName>style.visibility</p:attrName>
+                                        </p:attrNameLst>
+                                      </p:cBhvr>
+                                      <p:to>
+                                        <p:strVal val="visible"/>
+                                      </p:to>
+                                    </p:set>
+                                    <p:anim calcmode="lin" valueType="num">
+                                      <p:cBhvr additive="base">
+                                        <p:cTn id="53" dur="500" fill="hold"/>
+                                        <p:tgtEl>
+                                          <p:spTgt spid="11"/>
+                                        </p:tgtEl>
+                                        <p:attrNameLst>
+                                          <p:attrName>ppt_x</p:attrName>
+                                        </p:attrNameLst>
+                                      </p:cBhvr>
+                                      <p:tavLst>
+                                        <p:tav tm="0">
+                                          <p:val>
+                                            <p:strVal val="#ppt_x"/>
+                                          </p:val>
+                                        </p:tav>
+                                        <p:tav tm="100000">
+                                          <p:val>
+                                            <p:strVal val="#ppt_x"/>
+                                          </p:val>
+                                        </p:tav>
+                                      </p:tavLst>
+                                    </p:anim>
+                                    <p:anim calcmode="lin" valueType="num">
+                                      <p:cBhvr additive="base">
+                                        <p:cTn id="54" dur="500" fill="hold"/>
+                                        <p:tgtEl>
+                                          <p:spTgt spid="11"/>
+                                        </p:tgtEl>
+                                        <p:attrNameLst>
+                                          <p:attrName>ppt_y</p:attrName>
+                                        </p:attrNameLst>
+                                      </p:cBhvr>
+                                      <p:tavLst>
+                                        <p:tav tm="0">
+                                          <p:val>
+                                            <p:strVal val="1+#ppt_h/2"/>
+                                          </p:val>
+                                        </p:tav>
+                                        <p:tav tm="100000">
+                                          <p:val>
+                                            <p:strVal val="#ppt_y"/>
+                                          </p:val>
+                                        </p:tav>
+                                      </p:tavLst>
+                                    </p:anim>
+                                  </p:childTnLst>
+                                </p:cTn>
+                              </p:par>
+                            </p:childTnLst>
+                          </p:cTn>
+                        </p:par>
+                      </p:childTnLst>
+                    </p:cTn>
+                  </p:par>
+                  <p:par>
+                    <p:cTn id="55" fill="hold">
+                      <p:stCondLst>
+                        <p:cond delay="indefinite"/>
+                      </p:stCondLst>
+                      <p:childTnLst>
+                        <p:par>
+                          <p:cTn id="56" fill="hold">
+                            <p:stCondLst>
+                              <p:cond delay="0"/>
+                            </p:stCondLst>
+                            <p:childTnLst>
+                              <p:par>
+                                <p:cTn id="57" presetID="2" presetClass="entr" presetSubtype="4" fill="hold" grpId="0" nodeType="clickEffect">
+                                  <p:stCondLst>
+                                    <p:cond delay="0"/>
+                                  </p:stCondLst>
+                                  <p:childTnLst>
+                                    <p:set>
+                                      <p:cBhvr>
+                                        <p:cTn id="58" dur="1" fill="hold">
+                                          <p:stCondLst>
+                                            <p:cond delay="0"/>
+                                          </p:stCondLst>
+                                        </p:cTn>
+                                        <p:tgtEl>
+                                          <p:spTgt spid="23"/>
+                                        </p:tgtEl>
+                                        <p:attrNameLst>
+                                          <p:attrName>style.visibility</p:attrName>
+                                        </p:attrNameLst>
+                                      </p:cBhvr>
+                                      <p:to>
+                                        <p:strVal val="visible"/>
+                                      </p:to>
+                                    </p:set>
+                                    <p:anim calcmode="lin" valueType="num">
+                                      <p:cBhvr additive="base">
+                                        <p:cTn id="59" dur="500" fill="hold"/>
+                                        <p:tgtEl>
+                                          <p:spTgt spid="23"/>
+                                        </p:tgtEl>
+                                        <p:attrNameLst>
+                                          <p:attrName>ppt_x</p:attrName>
+                                        </p:attrNameLst>
+                                      </p:cBhvr>
+                                      <p:tavLst>
+                                        <p:tav tm="0">
+                                          <p:val>
+                                            <p:strVal val="#ppt_x"/>
+                                          </p:val>
+                                        </p:tav>
+                                        <p:tav tm="100000">
+                                          <p:val>
+                                            <p:strVal val="#ppt_x"/>
+                                          </p:val>
+                                        </p:tav>
+                                      </p:tavLst>
+                                    </p:anim>
+                                    <p:anim calcmode="lin" valueType="num">
+                                      <p:cBhvr additive="base">
+                                        <p:cTn id="60" dur="500" fill="hold"/>
+                                        <p:tgtEl>
+                                          <p:spTgt spid="23"/>
+                                        </p:tgtEl>
+                                        <p:attrNameLst>
+                                          <p:attrName>ppt_y</p:attrName>
+                                        </p:attrNameLst>
+                                      </p:cBhvr>
+                                      <p:tavLst>
+                                        <p:tav tm="0">
+                                          <p:val>
+                                            <p:strVal val="1+#ppt_h/2"/>
+                                          </p:val>
+                                        </p:tav>
+                                        <p:tav tm="100000">
+                                          <p:val>
+                                            <p:strVal val="#ppt_y"/>
+                                          </p:val>
+                                        </p:tav>
+                                      </p:tavLst>
+                                    </p:anim>
+                                  </p:childTnLst>
+                                </p:cTn>
+                              </p:par>
+                              <p:par>
+                                <p:cTn id="61" presetID="2" presetClass="entr" presetSubtype="4" fill="hold" grpId="0" nodeType="withEffect">
+                                  <p:stCondLst>
+                                    <p:cond delay="0"/>
+                                  </p:stCondLst>
+                                  <p:childTnLst>
+                                    <p:set>
+                                      <p:cBhvr>
+                                        <p:cTn id="62" dur="1" fill="hold">
+                                          <p:stCondLst>
+                                            <p:cond delay="0"/>
+                                          </p:stCondLst>
+                                        </p:cTn>
+                                        <p:tgtEl>
+                                          <p:spTgt spid="29"/>
+                                        </p:tgtEl>
+                                        <p:attrNameLst>
+                                          <p:attrName>style.visibility</p:attrName>
+                                        </p:attrNameLst>
+                                      </p:cBhvr>
+                                      <p:to>
+                                        <p:strVal val="visible"/>
+                                      </p:to>
+                                    </p:set>
+                                    <p:anim calcmode="lin" valueType="num">
+                                      <p:cBhvr additive="base">
+                                        <p:cTn id="63" dur="500" fill="hold"/>
+                                        <p:tgtEl>
+                                          <p:spTgt spid="29"/>
+                                        </p:tgtEl>
+                                        <p:attrNameLst>
+                                          <p:attrName>ppt_x</p:attrName>
+                                        </p:attrNameLst>
+                                      </p:cBhvr>
+                                      <p:tavLst>
+                                        <p:tav tm="0">
+                                          <p:val>
+                                            <p:strVal val="#ppt_x"/>
+                                          </p:val>
+                                        </p:tav>
+                                        <p:tav tm="100000">
+                                          <p:val>
+                                            <p:strVal val="#ppt_x"/>
+                                          </p:val>
+                                        </p:tav>
+                                      </p:tavLst>
+                                    </p:anim>
+                                    <p:anim calcmode="lin" valueType="num">
+                                      <p:cBhvr additive="base">
+                                        <p:cTn id="64" dur="500" fill="hold"/>
+                                        <p:tgtEl>
+                                          <p:spTgt spid="29"/>
+                                        </p:tgtEl>
+                                        <p:attrNameLst>
+                                          <p:attrName>ppt_y</p:attrName>
+                                        </p:attrNameLst>
+                                      </p:cBhvr>
+                                      <p:tavLst>
+                                        <p:tav tm="0">
+                                          <p:val>
+                                            <p:strVal val="1+#ppt_h/2"/>
+                                          </p:val>
+                                        </p:tav>
+                                        <p:tav tm="100000">
+                                          <p:val>
+                                            <p:strVal val="#ppt_y"/>
+                                          </p:val>
+                                        </p:tav>
+                                      </p:tavLst>
+                                    </p:anim>
+                                  </p:childTnLst>
+                                </p:cTn>
+                              </p:par>
+                            </p:childTnLst>
+                          </p:cTn>
+                        </p:par>
+                      </p:childTnLst>
+                    </p:cTn>
+                  </p:par>
+                  <p:par>
+                    <p:cTn id="65" fill="hold">
+                      <p:stCondLst>
+                        <p:cond delay="indefinite"/>
+                      </p:stCondLst>
+                      <p:childTnLst>
+                        <p:par>
+                          <p:cTn id="66" fill="hold">
+                            <p:stCondLst>
+                              <p:cond delay="0"/>
+                            </p:stCondLst>
+                            <p:childTnLst>
+                              <p:par>
+                                <p:cTn id="67" presetID="2" presetClass="entr" presetSubtype="4" fill="hold" grpId="0" nodeType="clickEffect">
+                                  <p:stCondLst>
+                                    <p:cond delay="0"/>
+                                  </p:stCondLst>
+                                  <p:childTnLst>
+                                    <p:set>
+                                      <p:cBhvr>
+                                        <p:cTn id="68" dur="1" fill="hold">
+                                          <p:stCondLst>
+                                            <p:cond delay="0"/>
+                                          </p:stCondLst>
+                                        </p:cTn>
+                                        <p:tgtEl>
+                                          <p:spTgt spid="34"/>
+                                        </p:tgtEl>
+                                        <p:attrNameLst>
+                                          <p:attrName>style.visibility</p:attrName>
+                                        </p:attrNameLst>
+                                      </p:cBhvr>
+                                      <p:to>
+                                        <p:strVal val="visible"/>
+                                      </p:to>
+                                    </p:set>
+                                    <p:anim calcmode="lin" valueType="num">
+                                      <p:cBhvr additive="base">
+                                        <p:cTn id="69" dur="500" fill="hold"/>
+                                        <p:tgtEl>
+                                          <p:spTgt spid="34"/>
+                                        </p:tgtEl>
+                                        <p:attrNameLst>
+                                          <p:attrName>ppt_x</p:attrName>
+                                        </p:attrNameLst>
+                                      </p:cBhvr>
+                                      <p:tavLst>
+                                        <p:tav tm="0">
+                                          <p:val>
+                                            <p:strVal val="#ppt_x"/>
+                                          </p:val>
+                                        </p:tav>
+                                        <p:tav tm="100000">
+                                          <p:val>
+                                            <p:strVal val="#ppt_x"/>
+                                          </p:val>
+                                        </p:tav>
+                                      </p:tavLst>
+                                    </p:anim>
+                                    <p:anim calcmode="lin" valueType="num">
+                                      <p:cBhvr additive="base">
+                                        <p:cTn id="70" dur="500" fill="hold"/>
+                                        <p:tgtEl>
+                                          <p:spTgt spid="34"/>
+                                        </p:tgtEl>
+                                        <p:attrNameLst>
+                                          <p:attrName>ppt_y</p:attrName>
+                                        </p:attrNameLst>
+                                      </p:cBhvr>
+                                      <p:tavLst>
+                                        <p:tav tm="0">
+                                          <p:val>
+                                            <p:strVal val="1+#ppt_h/2"/>
+                                          </p:val>
+                                        </p:tav>
+                                        <p:tav tm="100000">
+                                          <p:val>
+                                            <p:strVal val="#ppt_y"/>
+                                          </p:val>
+                                        </p:tav>
+                                      </p:tavLst>
+                                    </p:anim>
+                                  </p:childTnLst>
+                                </p:cTn>
+                              </p:par>
+                              <p:par>
+                                <p:cTn id="71" presetID="2" presetClass="entr" presetSubtype="4" fill="hold" grpId="0" nodeType="withEffect">
+                                  <p:stCondLst>
+                                    <p:cond delay="0"/>
+                                  </p:stCondLst>
+                                  <p:childTnLst>
+                                    <p:set>
+                                      <p:cBhvr>
+                                        <p:cTn id="72" dur="1" fill="hold">
+                                          <p:stCondLst>
+                                            <p:cond delay="0"/>
+                                          </p:stCondLst>
+                                        </p:cTn>
+                                        <p:tgtEl>
+                                          <p:spTgt spid="33"/>
+                                        </p:tgtEl>
+                                        <p:attrNameLst>
+                                          <p:attrName>style.visibility</p:attrName>
+                                        </p:attrNameLst>
+                                      </p:cBhvr>
+                                      <p:to>
+                                        <p:strVal val="visible"/>
+                                      </p:to>
+                                    </p:set>
+                                    <p:anim calcmode="lin" valueType="num">
+                                      <p:cBhvr additive="base">
+                                        <p:cTn id="73" dur="500" fill="hold"/>
+                                        <p:tgtEl>
+                                          <p:spTgt spid="33"/>
+                                        </p:tgtEl>
+                                        <p:attrNameLst>
+                                          <p:attrName>ppt_x</p:attrName>
+                                        </p:attrNameLst>
+                                      </p:cBhvr>
+                                      <p:tavLst>
+                                        <p:tav tm="0">
+                                          <p:val>
+                                            <p:strVal val="#ppt_x"/>
+                                          </p:val>
+                                        </p:tav>
+                                        <p:tav tm="100000">
+                                          <p:val>
+                                            <p:strVal val="#ppt_x"/>
+                                          </p:val>
+                                        </p:tav>
+                                      </p:tavLst>
+                                    </p:anim>
+                                    <p:anim calcmode="lin" valueType="num">
+                                      <p:cBhvr additive="base">
+                                        <p:cTn id="74" dur="500" fill="hold"/>
+                                        <p:tgtEl>
+                                          <p:spTgt spid="33"/>
                                         </p:tgtEl>
                                         <p:attrNameLst>
                                           <p:attrName>ppt_y</p:attrName>
@@ -18275,6 +19131,26 @@
       <p:bldP spid="38917" grpId="0" bldLvl="0" animBg="1"/>
       <p:bldP spid="38918" grpId="0"/>
       <p:bldP spid="38919" grpId="0"/>
+      <p:bldP spid="20" grpId="0"/>
+      <p:bldP spid="20" grpId="1"/>
+      <p:bldP spid="38916" grpId="0"/>
+      <p:bldP spid="38916" grpId="1"/>
+      <p:bldP spid="22" grpId="0"/>
+      <p:bldP spid="38920" grpId="0" animBg="1"/>
+      <p:bldP spid="22" grpId="1"/>
+      <p:bldP spid="38920" grpId="1" animBg="1"/>
+      <p:bldP spid="23" grpId="0" animBg="1"/>
+      <p:bldP spid="29" grpId="0"/>
+      <p:bldP spid="23" grpId="1" animBg="1"/>
+      <p:bldP spid="29" grpId="1"/>
+      <p:bldP spid="11" grpId="0" animBg="1"/>
+      <p:bldP spid="11" grpId="1" animBg="1"/>
+      <p:bldP spid="34" grpId="0"/>
+      <p:bldP spid="33" grpId="0" animBg="1"/>
+      <p:bldP spid="34" grpId="1"/>
+      <p:bldP spid="33" grpId="1" animBg="1"/>
+      <p:bldP spid="38915" grpId="0"/>
+      <p:bldP spid="38915" grpId="1"/>
     </p:bldLst>
   </p:timing>
 </p:sld>
@@ -24625,7 +25501,7 @@
                 </a:solidFill>
                 <a:latin typeface="+mn-ea"/>
               </a:rPr>
-              <a:t>课堂练习</a:t>
+              <a:t>三星系统</a:t>
             </a:r>
             <a:endParaRPr lang="zh-CN" altLang="en-US" sz="2400" spc="300">
               <a:solidFill>
@@ -31460,39 +32336,21 @@
                                   </p:childTnLst>
                                 </p:cTn>
                               </p:par>
-                            </p:childTnLst>
-                          </p:cTn>
-                        </p:par>
-                      </p:childTnLst>
-                    </p:cTn>
-                  </p:par>
-                  <p:par>
-                    <p:cTn id="9" fill="hold">
-                      <p:stCondLst>
-                        <p:cond delay="indefinite"/>
-                      </p:stCondLst>
-                      <p:childTnLst>
-                        <p:par>
-                          <p:cTn id="10" fill="hold">
-                            <p:stCondLst>
-                              <p:cond delay="0"/>
-                            </p:stCondLst>
-                            <p:childTnLst>
                               <p:par>
-                                <p:cTn id="11" presetID="2" presetClass="entr" presetSubtype="4" fill="hold" grpId="0" nodeType="clickEffect">
+                                <p:cTn id="9" presetID="2" presetClass="entr" presetSubtype="4" fill="hold" grpId="0" nodeType="withEffect">
                                   <p:stCondLst>
                                     <p:cond delay="0"/>
                                   </p:stCondLst>
                                   <p:childTnLst>
                                     <p:set>
                                       <p:cBhvr>
-                                        <p:cTn id="12" dur="1" fill="hold">
+                                        <p:cTn id="10" dur="1" fill="hold">
                                           <p:stCondLst>
                                             <p:cond delay="0"/>
                                           </p:stCondLst>
                                         </p:cTn>
                                         <p:tgtEl>
-                                          <p:spTgt spid="38919"/>
+                                          <p:spTgt spid="38914"/>
                                         </p:tgtEl>
                                         <p:attrNameLst>
                                           <p:attrName>style.visibility</p:attrName>
@@ -31504,9 +32362,9 @@
                                     </p:set>
                                     <p:anim calcmode="lin" valueType="num">
                                       <p:cBhvr additive="base">
-                                        <p:cTn id="13" dur="500" fill="hold"/>
+                                        <p:cTn id="11" dur="500" fill="hold"/>
                                         <p:tgtEl>
-                                          <p:spTgt spid="38919"/>
+                                          <p:spTgt spid="38914"/>
                                         </p:tgtEl>
                                         <p:attrNameLst>
                                           <p:attrName>ppt_x</p:attrName>
@@ -31527,9 +32385,9 @@
                                     </p:anim>
                                     <p:anim calcmode="lin" valueType="num">
                                       <p:cBhvr additive="base">
-                                        <p:cTn id="14" dur="500" fill="hold"/>
+                                        <p:cTn id="12" dur="500" fill="hold"/>
                                         <p:tgtEl>
-                                          <p:spTgt spid="38919"/>
+                                          <p:spTgt spid="38914"/>
                                         </p:tgtEl>
                                         <p:attrNameLst>
                                           <p:attrName>ppt_y</p:attrName>
@@ -31558,26 +32416,190 @@
                     </p:cTn>
                   </p:par>
                   <p:par>
-                    <p:cTn id="15" fill="hold">
+                    <p:cTn id="13" fill="hold">
                       <p:stCondLst>
                         <p:cond delay="indefinite"/>
                       </p:stCondLst>
                       <p:childTnLst>
                         <p:par>
-                          <p:cTn id="16" fill="hold">
+                          <p:cTn id="14" fill="hold">
                             <p:stCondLst>
                               <p:cond delay="0"/>
                             </p:stCondLst>
                             <p:childTnLst>
                               <p:par>
-                                <p:cTn id="17" presetID="2" presetClass="entr" presetSubtype="4" fill="hold" grpId="0" nodeType="clickEffect">
+                                <p:cTn id="15" presetID="2" presetClass="entr" presetSubtype="4" fill="hold" grpId="0" nodeType="clickEffect">
                                   <p:stCondLst>
                                     <p:cond delay="0"/>
                                   </p:stCondLst>
                                   <p:childTnLst>
                                     <p:set>
                                       <p:cBhvr>
-                                        <p:cTn id="18" dur="1" fill="hold">
+                                        <p:cTn id="16" dur="1" fill="hold">
+                                          <p:stCondLst>
+                                            <p:cond delay="0"/>
+                                          </p:stCondLst>
+                                        </p:cTn>
+                                        <p:tgtEl>
+                                          <p:spTgt spid="38919"/>
+                                        </p:tgtEl>
+                                        <p:attrNameLst>
+                                          <p:attrName>style.visibility</p:attrName>
+                                        </p:attrNameLst>
+                                      </p:cBhvr>
+                                      <p:to>
+                                        <p:strVal val="visible"/>
+                                      </p:to>
+                                    </p:set>
+                                    <p:anim calcmode="lin" valueType="num">
+                                      <p:cBhvr additive="base">
+                                        <p:cTn id="17" dur="500" fill="hold"/>
+                                        <p:tgtEl>
+                                          <p:spTgt spid="38919"/>
+                                        </p:tgtEl>
+                                        <p:attrNameLst>
+                                          <p:attrName>ppt_x</p:attrName>
+                                        </p:attrNameLst>
+                                      </p:cBhvr>
+                                      <p:tavLst>
+                                        <p:tav tm="0">
+                                          <p:val>
+                                            <p:strVal val="#ppt_x"/>
+                                          </p:val>
+                                        </p:tav>
+                                        <p:tav tm="100000">
+                                          <p:val>
+                                            <p:strVal val="#ppt_x"/>
+                                          </p:val>
+                                        </p:tav>
+                                      </p:tavLst>
+                                    </p:anim>
+                                    <p:anim calcmode="lin" valueType="num">
+                                      <p:cBhvr additive="base">
+                                        <p:cTn id="18" dur="500" fill="hold"/>
+                                        <p:tgtEl>
+                                          <p:spTgt spid="38919"/>
+                                        </p:tgtEl>
+                                        <p:attrNameLst>
+                                          <p:attrName>ppt_y</p:attrName>
+                                        </p:attrNameLst>
+                                      </p:cBhvr>
+                                      <p:tavLst>
+                                        <p:tav tm="0">
+                                          <p:val>
+                                            <p:strVal val="1+#ppt_h/2"/>
+                                          </p:val>
+                                        </p:tav>
+                                        <p:tav tm="100000">
+                                          <p:val>
+                                            <p:strVal val="#ppt_y"/>
+                                          </p:val>
+                                        </p:tav>
+                                      </p:tavLst>
+                                    </p:anim>
+                                  </p:childTnLst>
+                                </p:cTn>
+                              </p:par>
+                              <p:par>
+                                <p:cTn id="19" presetID="2" presetClass="entr" presetSubtype="4" fill="hold" grpId="0" nodeType="withEffect">
+                                  <p:stCondLst>
+                                    <p:cond delay="0"/>
+                                  </p:stCondLst>
+                                  <p:childTnLst>
+                                    <p:set>
+                                      <p:cBhvr>
+                                        <p:cTn id="20" dur="1" fill="hold">
+                                          <p:stCondLst>
+                                            <p:cond delay="0"/>
+                                          </p:stCondLst>
+                                        </p:cTn>
+                                        <p:tgtEl>
+                                          <p:spTgt spid="38916"/>
+                                        </p:tgtEl>
+                                        <p:attrNameLst>
+                                          <p:attrName>style.visibility</p:attrName>
+                                        </p:attrNameLst>
+                                      </p:cBhvr>
+                                      <p:to>
+                                        <p:strVal val="visible"/>
+                                      </p:to>
+                                    </p:set>
+                                    <p:anim calcmode="lin" valueType="num">
+                                      <p:cBhvr additive="base">
+                                        <p:cTn id="21" dur="500" fill="hold"/>
+                                        <p:tgtEl>
+                                          <p:spTgt spid="38916"/>
+                                        </p:tgtEl>
+                                        <p:attrNameLst>
+                                          <p:attrName>ppt_x</p:attrName>
+                                        </p:attrNameLst>
+                                      </p:cBhvr>
+                                      <p:tavLst>
+                                        <p:tav tm="0">
+                                          <p:val>
+                                            <p:strVal val="#ppt_x"/>
+                                          </p:val>
+                                        </p:tav>
+                                        <p:tav tm="100000">
+                                          <p:val>
+                                            <p:strVal val="#ppt_x"/>
+                                          </p:val>
+                                        </p:tav>
+                                      </p:tavLst>
+                                    </p:anim>
+                                    <p:anim calcmode="lin" valueType="num">
+                                      <p:cBhvr additive="base">
+                                        <p:cTn id="22" dur="500" fill="hold"/>
+                                        <p:tgtEl>
+                                          <p:spTgt spid="38916"/>
+                                        </p:tgtEl>
+                                        <p:attrNameLst>
+                                          <p:attrName>ppt_y</p:attrName>
+                                        </p:attrNameLst>
+                                      </p:cBhvr>
+                                      <p:tavLst>
+                                        <p:tav tm="0">
+                                          <p:val>
+                                            <p:strVal val="1+#ppt_h/2"/>
+                                          </p:val>
+                                        </p:tav>
+                                        <p:tav tm="100000">
+                                          <p:val>
+                                            <p:strVal val="#ppt_y"/>
+                                          </p:val>
+                                        </p:tav>
+                                      </p:tavLst>
+                                    </p:anim>
+                                  </p:childTnLst>
+                                </p:cTn>
+                              </p:par>
+                            </p:childTnLst>
+                          </p:cTn>
+                        </p:par>
+                      </p:childTnLst>
+                    </p:cTn>
+                  </p:par>
+                  <p:par>
+                    <p:cTn id="23" fill="hold">
+                      <p:stCondLst>
+                        <p:cond delay="indefinite"/>
+                      </p:stCondLst>
+                      <p:childTnLst>
+                        <p:par>
+                          <p:cTn id="24" fill="hold">
+                            <p:stCondLst>
+                              <p:cond delay="0"/>
+                            </p:stCondLst>
+                            <p:childTnLst>
+                              <p:par>
+                                <p:cTn id="25" presetID="2" presetClass="entr" presetSubtype="4" fill="hold" grpId="0" nodeType="clickEffect">
+                                  <p:stCondLst>
+                                    <p:cond delay="0"/>
+                                  </p:stCondLst>
+                                  <p:childTnLst>
+                                    <p:set>
+                                      <p:cBhvr>
+                                        <p:cTn id="26" dur="1" fill="hold">
                                           <p:stCondLst>
                                             <p:cond delay="0"/>
                                           </p:stCondLst>
@@ -31595,7 +32617,7 @@
                                     </p:set>
                                     <p:anim calcmode="lin" valueType="num">
                                       <p:cBhvr additive="base">
-                                        <p:cTn id="19" dur="500" fill="hold"/>
+                                        <p:cTn id="27" dur="500" fill="hold"/>
                                         <p:tgtEl>
                                           <p:spTgt spid="38917"/>
                                         </p:tgtEl>
@@ -31618,7 +32640,7 @@
                                     </p:anim>
                                     <p:anim calcmode="lin" valueType="num">
                                       <p:cBhvr additive="base">
-                                        <p:cTn id="20" dur="500" fill="hold"/>
+                                        <p:cTn id="28" dur="500" fill="hold"/>
                                         <p:tgtEl>
                                           <p:spTgt spid="38917"/>
                                         </p:tgtEl>
@@ -31649,26 +32671,26 @@
                     </p:cTn>
                   </p:par>
                   <p:par>
-                    <p:cTn id="21" fill="hold">
+                    <p:cTn id="29" fill="hold">
                       <p:stCondLst>
                         <p:cond delay="indefinite"/>
                       </p:stCondLst>
                       <p:childTnLst>
                         <p:par>
-                          <p:cTn id="22" fill="hold">
+                          <p:cTn id="30" fill="hold">
                             <p:stCondLst>
                               <p:cond delay="0"/>
                             </p:stCondLst>
                             <p:childTnLst>
                               <p:par>
-                                <p:cTn id="23" presetID="2" presetClass="entr" presetSubtype="4" fill="hold" nodeType="clickEffect">
+                                <p:cTn id="31" presetID="2" presetClass="entr" presetSubtype="4" fill="hold" nodeType="clickEffect">
                                   <p:stCondLst>
                                     <p:cond delay="0"/>
                                   </p:stCondLst>
                                   <p:childTnLst>
                                     <p:set>
                                       <p:cBhvr>
-                                        <p:cTn id="24" dur="1" fill="hold">
+                                        <p:cTn id="32" dur="1" fill="hold">
                                           <p:stCondLst>
                                             <p:cond delay="0"/>
                                           </p:stCondLst>
@@ -31686,7 +32708,7 @@
                                     </p:set>
                                     <p:anim calcmode="lin" valueType="num">
                                       <p:cBhvr additive="base">
-                                        <p:cTn id="25" dur="500" fill="hold"/>
+                                        <p:cTn id="33" dur="500" fill="hold"/>
                                         <p:tgtEl>
                                           <p:spTgt spid="38923"/>
                                         </p:tgtEl>
@@ -31709,7 +32731,7 @@
                                     </p:anim>
                                     <p:anim calcmode="lin" valueType="num">
                                       <p:cBhvr additive="base">
-                                        <p:cTn id="26" dur="500" fill="hold"/>
+                                        <p:cTn id="34" dur="500" fill="hold"/>
                                         <p:tgtEl>
                                           <p:spTgt spid="38923"/>
                                         </p:tgtEl>
@@ -31740,26 +32762,281 @@
                     </p:cTn>
                   </p:par>
                   <p:par>
-                    <p:cTn id="27" fill="hold">
+                    <p:cTn id="35" fill="hold">
                       <p:stCondLst>
                         <p:cond delay="indefinite"/>
                       </p:stCondLst>
                       <p:childTnLst>
                         <p:par>
-                          <p:cTn id="28" fill="hold">
+                          <p:cTn id="36" fill="hold">
                             <p:stCondLst>
                               <p:cond delay="0"/>
                             </p:stCondLst>
                             <p:childTnLst>
                               <p:par>
-                                <p:cTn id="29" presetID="49" presetClass="entr" presetSubtype="0" decel="100000" fill="hold" grpId="0" nodeType="clickEffect">
+                                <p:cTn id="37" presetID="2" presetClass="entr" presetSubtype="4" fill="hold" grpId="0" nodeType="clickEffect">
                                   <p:stCondLst>
                                     <p:cond delay="0"/>
                                   </p:stCondLst>
                                   <p:childTnLst>
                                     <p:set>
                                       <p:cBhvr>
-                                        <p:cTn id="30" dur="1" fill="hold">
+                                        <p:cTn id="38" dur="1" fill="hold">
+                                          <p:stCondLst>
+                                            <p:cond delay="0"/>
+                                          </p:stCondLst>
+                                        </p:cTn>
+                                        <p:tgtEl>
+                                          <p:spTgt spid="38915"/>
+                                        </p:tgtEl>
+                                        <p:attrNameLst>
+                                          <p:attrName>style.visibility</p:attrName>
+                                        </p:attrNameLst>
+                                      </p:cBhvr>
+                                      <p:to>
+                                        <p:strVal val="visible"/>
+                                      </p:to>
+                                    </p:set>
+                                    <p:anim calcmode="lin" valueType="num">
+                                      <p:cBhvr additive="base">
+                                        <p:cTn id="39" dur="500" fill="hold"/>
+                                        <p:tgtEl>
+                                          <p:spTgt spid="38915"/>
+                                        </p:tgtEl>
+                                        <p:attrNameLst>
+                                          <p:attrName>ppt_x</p:attrName>
+                                        </p:attrNameLst>
+                                      </p:cBhvr>
+                                      <p:tavLst>
+                                        <p:tav tm="0">
+                                          <p:val>
+                                            <p:strVal val="#ppt_x"/>
+                                          </p:val>
+                                        </p:tav>
+                                        <p:tav tm="100000">
+                                          <p:val>
+                                            <p:strVal val="#ppt_x"/>
+                                          </p:val>
+                                        </p:tav>
+                                      </p:tavLst>
+                                    </p:anim>
+                                    <p:anim calcmode="lin" valueType="num">
+                                      <p:cBhvr additive="base">
+                                        <p:cTn id="40" dur="500" fill="hold"/>
+                                        <p:tgtEl>
+                                          <p:spTgt spid="38915"/>
+                                        </p:tgtEl>
+                                        <p:attrNameLst>
+                                          <p:attrName>ppt_y</p:attrName>
+                                        </p:attrNameLst>
+                                      </p:cBhvr>
+                                      <p:tavLst>
+                                        <p:tav tm="0">
+                                          <p:val>
+                                            <p:strVal val="1+#ppt_h/2"/>
+                                          </p:val>
+                                        </p:tav>
+                                        <p:tav tm="100000">
+                                          <p:val>
+                                            <p:strVal val="#ppt_y"/>
+                                          </p:val>
+                                        </p:tav>
+                                      </p:tavLst>
+                                    </p:anim>
+                                  </p:childTnLst>
+                                </p:cTn>
+                              </p:par>
+                            </p:childTnLst>
+                          </p:cTn>
+                        </p:par>
+                      </p:childTnLst>
+                    </p:cTn>
+                  </p:par>
+                  <p:par>
+                    <p:cTn id="41" fill="hold">
+                      <p:stCondLst>
+                        <p:cond delay="indefinite"/>
+                      </p:stCondLst>
+                      <p:childTnLst>
+                        <p:par>
+                          <p:cTn id="42" fill="hold">
+                            <p:stCondLst>
+                              <p:cond delay="0"/>
+                            </p:stCondLst>
+                            <p:childTnLst>
+                              <p:par>
+                                <p:cTn id="43" presetID="2" presetClass="entr" presetSubtype="4" fill="hold" grpId="0" nodeType="clickEffect">
+                                  <p:stCondLst>
+                                    <p:cond delay="0"/>
+                                  </p:stCondLst>
+                                  <p:childTnLst>
+                                    <p:set>
+                                      <p:cBhvr>
+                                        <p:cTn id="44" dur="1" fill="hold">
+                                          <p:stCondLst>
+                                            <p:cond delay="0"/>
+                                          </p:stCondLst>
+                                        </p:cTn>
+                                        <p:tgtEl>
+                                          <p:spTgt spid="38920"/>
+                                        </p:tgtEl>
+                                        <p:attrNameLst>
+                                          <p:attrName>style.visibility</p:attrName>
+                                        </p:attrNameLst>
+                                      </p:cBhvr>
+                                      <p:to>
+                                        <p:strVal val="visible"/>
+                                      </p:to>
+                                    </p:set>
+                                    <p:anim calcmode="lin" valueType="num">
+                                      <p:cBhvr additive="base">
+                                        <p:cTn id="45" dur="500" fill="hold"/>
+                                        <p:tgtEl>
+                                          <p:spTgt spid="38920"/>
+                                        </p:tgtEl>
+                                        <p:attrNameLst>
+                                          <p:attrName>ppt_x</p:attrName>
+                                        </p:attrNameLst>
+                                      </p:cBhvr>
+                                      <p:tavLst>
+                                        <p:tav tm="0">
+                                          <p:val>
+                                            <p:strVal val="#ppt_x"/>
+                                          </p:val>
+                                        </p:tav>
+                                        <p:tav tm="100000">
+                                          <p:val>
+                                            <p:strVal val="#ppt_x"/>
+                                          </p:val>
+                                        </p:tav>
+                                      </p:tavLst>
+                                    </p:anim>
+                                    <p:anim calcmode="lin" valueType="num">
+                                      <p:cBhvr additive="base">
+                                        <p:cTn id="46" dur="500" fill="hold"/>
+                                        <p:tgtEl>
+                                          <p:spTgt spid="38920"/>
+                                        </p:tgtEl>
+                                        <p:attrNameLst>
+                                          <p:attrName>ppt_y</p:attrName>
+                                        </p:attrNameLst>
+                                      </p:cBhvr>
+                                      <p:tavLst>
+                                        <p:tav tm="0">
+                                          <p:val>
+                                            <p:strVal val="1+#ppt_h/2"/>
+                                          </p:val>
+                                        </p:tav>
+                                        <p:tav tm="100000">
+                                          <p:val>
+                                            <p:strVal val="#ppt_y"/>
+                                          </p:val>
+                                        </p:tav>
+                                      </p:tavLst>
+                                    </p:anim>
+                                  </p:childTnLst>
+                                </p:cTn>
+                              </p:par>
+                              <p:par>
+                                <p:cTn id="47" presetID="2" presetClass="entr" presetSubtype="4" fill="hold" grpId="0" nodeType="withEffect">
+                                  <p:stCondLst>
+                                    <p:cond delay="0"/>
+                                  </p:stCondLst>
+                                  <p:childTnLst>
+                                    <p:set>
+                                      <p:cBhvr>
+                                        <p:cTn id="48" dur="1" fill="hold">
+                                          <p:stCondLst>
+                                            <p:cond delay="0"/>
+                                          </p:stCondLst>
+                                        </p:cTn>
+                                        <p:tgtEl>
+                                          <p:spTgt spid="38928"/>
+                                        </p:tgtEl>
+                                        <p:attrNameLst>
+                                          <p:attrName>style.visibility</p:attrName>
+                                        </p:attrNameLst>
+                                      </p:cBhvr>
+                                      <p:to>
+                                        <p:strVal val="visible"/>
+                                      </p:to>
+                                    </p:set>
+                                    <p:anim calcmode="lin" valueType="num">
+                                      <p:cBhvr additive="base">
+                                        <p:cTn id="49" dur="500" fill="hold"/>
+                                        <p:tgtEl>
+                                          <p:spTgt spid="38928"/>
+                                        </p:tgtEl>
+                                        <p:attrNameLst>
+                                          <p:attrName>ppt_x</p:attrName>
+                                        </p:attrNameLst>
+                                      </p:cBhvr>
+                                      <p:tavLst>
+                                        <p:tav tm="0">
+                                          <p:val>
+                                            <p:strVal val="#ppt_x"/>
+                                          </p:val>
+                                        </p:tav>
+                                        <p:tav tm="100000">
+                                          <p:val>
+                                            <p:strVal val="#ppt_x"/>
+                                          </p:val>
+                                        </p:tav>
+                                      </p:tavLst>
+                                    </p:anim>
+                                    <p:anim calcmode="lin" valueType="num">
+                                      <p:cBhvr additive="base">
+                                        <p:cTn id="50" dur="500" fill="hold"/>
+                                        <p:tgtEl>
+                                          <p:spTgt spid="38928"/>
+                                        </p:tgtEl>
+                                        <p:attrNameLst>
+                                          <p:attrName>ppt_y</p:attrName>
+                                        </p:attrNameLst>
+                                      </p:cBhvr>
+                                      <p:tavLst>
+                                        <p:tav tm="0">
+                                          <p:val>
+                                            <p:strVal val="1+#ppt_h/2"/>
+                                          </p:val>
+                                        </p:tav>
+                                        <p:tav tm="100000">
+                                          <p:val>
+                                            <p:strVal val="#ppt_y"/>
+                                          </p:val>
+                                        </p:tav>
+                                      </p:tavLst>
+                                    </p:anim>
+                                  </p:childTnLst>
+                                </p:cTn>
+                              </p:par>
+                            </p:childTnLst>
+                          </p:cTn>
+                        </p:par>
+                      </p:childTnLst>
+                    </p:cTn>
+                  </p:par>
+                  <p:par>
+                    <p:cTn id="51" fill="hold">
+                      <p:stCondLst>
+                        <p:cond delay="indefinite"/>
+                      </p:stCondLst>
+                      <p:childTnLst>
+                        <p:par>
+                          <p:cTn id="52" fill="hold">
+                            <p:stCondLst>
+                              <p:cond delay="0"/>
+                            </p:stCondLst>
+                            <p:childTnLst>
+                              <p:par>
+                                <p:cTn id="53" presetID="49" presetClass="entr" presetSubtype="0" decel="100000" fill="hold" grpId="0" nodeType="clickEffect">
+                                  <p:stCondLst>
+                                    <p:cond delay="0"/>
+                                  </p:stCondLst>
+                                  <p:childTnLst>
+                                    <p:set>
+                                      <p:cBhvr>
+                                        <p:cTn id="54" dur="1" fill="hold">
                                           <p:stCondLst>
                                             <p:cond delay="0"/>
                                           </p:stCondLst>
@@ -31777,7 +33054,7 @@
                                     </p:set>
                                     <p:anim calcmode="lin" valueType="num">
                                       <p:cBhvr>
-                                        <p:cTn id="31" dur="500" fill="hold"/>
+                                        <p:cTn id="55" dur="500" fill="hold"/>
                                         <p:tgtEl>
                                           <p:spTgt spid="38922"/>
                                         </p:tgtEl>
@@ -31800,7 +33077,7 @@
                                     </p:anim>
                                     <p:anim calcmode="lin" valueType="num">
                                       <p:cBhvr>
-                                        <p:cTn id="32" dur="500" fill="hold"/>
+                                        <p:cTn id="56" dur="500" fill="hold"/>
                                         <p:tgtEl>
                                           <p:spTgt spid="38922"/>
                                         </p:tgtEl>
@@ -31823,7 +33100,7 @@
                                     </p:anim>
                                     <p:anim calcmode="lin" valueType="num">
                                       <p:cBhvr>
-                                        <p:cTn id="33" dur="500" fill="hold"/>
+                                        <p:cTn id="57" dur="500" fill="hold"/>
                                         <p:tgtEl>
                                           <p:spTgt spid="38922"/>
                                         </p:tgtEl>
@@ -31846,7 +33123,7 @@
                                     </p:anim>
                                     <p:animEffect transition="in" filter="fade">
                                       <p:cBhvr>
-                                        <p:cTn id="34" dur="500"/>
+                                        <p:cTn id="58" dur="500"/>
                                         <p:tgtEl>
                                           <p:spTgt spid="38922"/>
                                         </p:tgtEl>
@@ -31887,6 +33164,16 @@
       <p:bldP spid="38918" grpId="0"/>
       <p:bldP spid="38919" grpId="0"/>
       <p:bldP spid="38922" grpId="0" bldLvl="0" animBg="1"/>
+      <p:bldP spid="38914" grpId="0"/>
+      <p:bldP spid="38914" grpId="1"/>
+      <p:bldP spid="38916" grpId="0"/>
+      <p:bldP spid="38916" grpId="1"/>
+      <p:bldP spid="38920" grpId="0" animBg="1"/>
+      <p:bldP spid="38920" grpId="1" animBg="1"/>
+      <p:bldP spid="38928" grpId="0" animBg="1"/>
+      <p:bldP spid="38928" grpId="1" animBg="1"/>
+      <p:bldP spid="38915" grpId="0"/>
+      <p:bldP spid="38915" grpId="1"/>
     </p:bldLst>
   </p:timing>
 </p:sld>
@@ -34691,7 +35978,7 @@
                             </p:stCondLst>
                             <p:childTnLst>
                               <p:par>
-                                <p:cTn id="5" presetID="49" presetClass="entr" presetSubtype="0" decel="100000" fill="hold" nodeType="clickEffect">
+                                <p:cTn id="5" presetID="2" presetClass="entr" presetSubtype="4" fill="hold" grpId="0" nodeType="clickEffect">
                                   <p:stCondLst>
                                     <p:cond delay="0"/>
                                   </p:stCondLst>
@@ -34699,6 +35986,97 @@
                                     <p:set>
                                       <p:cBhvr>
                                         <p:cTn id="6" dur="1" fill="hold">
+                                          <p:stCondLst>
+                                            <p:cond delay="0"/>
+                                          </p:stCondLst>
+                                        </p:cTn>
+                                        <p:tgtEl>
+                                          <p:spTgt spid="39946"/>
+                                        </p:tgtEl>
+                                        <p:attrNameLst>
+                                          <p:attrName>style.visibility</p:attrName>
+                                        </p:attrNameLst>
+                                      </p:cBhvr>
+                                      <p:to>
+                                        <p:strVal val="visible"/>
+                                      </p:to>
+                                    </p:set>
+                                    <p:anim calcmode="lin" valueType="num">
+                                      <p:cBhvr additive="base">
+                                        <p:cTn id="7" dur="500" fill="hold"/>
+                                        <p:tgtEl>
+                                          <p:spTgt spid="39946"/>
+                                        </p:tgtEl>
+                                        <p:attrNameLst>
+                                          <p:attrName>ppt_x</p:attrName>
+                                        </p:attrNameLst>
+                                      </p:cBhvr>
+                                      <p:tavLst>
+                                        <p:tav tm="0">
+                                          <p:val>
+                                            <p:strVal val="#ppt_x"/>
+                                          </p:val>
+                                        </p:tav>
+                                        <p:tav tm="100000">
+                                          <p:val>
+                                            <p:strVal val="#ppt_x"/>
+                                          </p:val>
+                                        </p:tav>
+                                      </p:tavLst>
+                                    </p:anim>
+                                    <p:anim calcmode="lin" valueType="num">
+                                      <p:cBhvr additive="base">
+                                        <p:cTn id="8" dur="500" fill="hold"/>
+                                        <p:tgtEl>
+                                          <p:spTgt spid="39946"/>
+                                        </p:tgtEl>
+                                        <p:attrNameLst>
+                                          <p:attrName>ppt_y</p:attrName>
+                                        </p:attrNameLst>
+                                      </p:cBhvr>
+                                      <p:tavLst>
+                                        <p:tav tm="0">
+                                          <p:val>
+                                            <p:strVal val="1+#ppt_h/2"/>
+                                          </p:val>
+                                        </p:tav>
+                                        <p:tav tm="100000">
+                                          <p:val>
+                                            <p:strVal val="#ppt_y"/>
+                                          </p:val>
+                                        </p:tav>
+                                      </p:tavLst>
+                                    </p:anim>
+                                  </p:childTnLst>
+                                </p:cTn>
+                              </p:par>
+                            </p:childTnLst>
+                          </p:cTn>
+                        </p:par>
+                      </p:childTnLst>
+                    </p:cTn>
+                  </p:par>
+                  <p:par>
+                    <p:cTn id="9" fill="hold">
+                      <p:stCondLst>
+                        <p:cond delay="indefinite"/>
+                      </p:stCondLst>
+                      <p:childTnLst>
+                        <p:par>
+                          <p:cTn id="10" fill="hold">
+                            <p:stCondLst>
+                              <p:cond delay="0"/>
+                            </p:stCondLst>
+                            <p:childTnLst>
+                              <p:par>
+                                <p:cTn id="11" presetID="49" presetClass="entr" presetSubtype="0" decel="100000" fill="hold" nodeType="clickEffect">
+                                  <p:stCondLst>
+                                    <p:cond delay="0"/>
+                                  </p:stCondLst>
+                                  <p:childTnLst>
+                                    <p:set>
+                                      <p:cBhvr>
+                                        <p:cTn id="12" dur="1" fill="hold">
                                           <p:stCondLst>
                                             <p:cond delay="0"/>
                                           </p:stCondLst>
@@ -34716,7 +36094,7 @@
                                     </p:set>
                                     <p:anim calcmode="lin" valueType="num">
                                       <p:cBhvr>
-                                        <p:cTn id="7" dur="500" fill="hold"/>
+                                        <p:cTn id="13" dur="500" fill="hold"/>
                                         <p:tgtEl>
                                           <p:spTgt spid="39945"/>
                                         </p:tgtEl>
@@ -34739,7 +36117,7 @@
                                     </p:anim>
                                     <p:anim calcmode="lin" valueType="num">
                                       <p:cBhvr>
-                                        <p:cTn id="8" dur="500" fill="hold"/>
+                                        <p:cTn id="14" dur="500" fill="hold"/>
                                         <p:tgtEl>
                                           <p:spTgt spid="39945"/>
                                         </p:tgtEl>
@@ -34762,7 +36140,7 @@
                                     </p:anim>
                                     <p:anim calcmode="lin" valueType="num">
                                       <p:cBhvr>
-                                        <p:cTn id="9" dur="500" fill="hold"/>
+                                        <p:cTn id="15" dur="500" fill="hold"/>
                                         <p:tgtEl>
                                           <p:spTgt spid="39945"/>
                                         </p:tgtEl>
@@ -34785,7 +36163,7 @@
                                     </p:anim>
                                     <p:animEffect transition="in" filter="fade">
                                       <p:cBhvr>
-                                        <p:cTn id="10" dur="500"/>
+                                        <p:cTn id="16" dur="500"/>
                                         <p:tgtEl>
                                           <p:spTgt spid="39945"/>
                                         </p:tgtEl>
@@ -34801,26 +36179,208 @@
                     </p:cTn>
                   </p:par>
                   <p:par>
-                    <p:cTn id="11" fill="hold">
+                    <p:cTn id="17" fill="hold">
                       <p:stCondLst>
                         <p:cond delay="indefinite"/>
                       </p:stCondLst>
                       <p:childTnLst>
                         <p:par>
-                          <p:cTn id="12" fill="hold">
+                          <p:cTn id="18" fill="hold">
                             <p:stCondLst>
                               <p:cond delay="0"/>
                             </p:stCondLst>
                             <p:childTnLst>
                               <p:par>
-                                <p:cTn id="13" presetID="49" presetClass="entr" presetSubtype="0" decel="100000" fill="hold" nodeType="clickEffect">
+                                <p:cTn id="19" presetID="2" presetClass="entr" presetSubtype="4" fill="hold" grpId="0" nodeType="clickEffect">
                                   <p:stCondLst>
                                     <p:cond delay="0"/>
                                   </p:stCondLst>
                                   <p:childTnLst>
                                     <p:set>
                                       <p:cBhvr>
-                                        <p:cTn id="14" dur="1" fill="hold">
+                                        <p:cTn id="20" dur="1" fill="hold">
+                                          <p:stCondLst>
+                                            <p:cond delay="0"/>
+                                          </p:stCondLst>
+                                        </p:cTn>
+                                        <p:tgtEl>
+                                          <p:spTgt spid="39947"/>
+                                        </p:tgtEl>
+                                        <p:attrNameLst>
+                                          <p:attrName>style.visibility</p:attrName>
+                                        </p:attrNameLst>
+                                      </p:cBhvr>
+                                      <p:to>
+                                        <p:strVal val="visible"/>
+                                      </p:to>
+                                    </p:set>
+                                    <p:anim calcmode="lin" valueType="num">
+                                      <p:cBhvr additive="base">
+                                        <p:cTn id="21" dur="500" fill="hold"/>
+                                        <p:tgtEl>
+                                          <p:spTgt spid="39947"/>
+                                        </p:tgtEl>
+                                        <p:attrNameLst>
+                                          <p:attrName>ppt_x</p:attrName>
+                                        </p:attrNameLst>
+                                      </p:cBhvr>
+                                      <p:tavLst>
+                                        <p:tav tm="0">
+                                          <p:val>
+                                            <p:strVal val="#ppt_x"/>
+                                          </p:val>
+                                        </p:tav>
+                                        <p:tav tm="100000">
+                                          <p:val>
+                                            <p:strVal val="#ppt_x"/>
+                                          </p:val>
+                                        </p:tav>
+                                      </p:tavLst>
+                                    </p:anim>
+                                    <p:anim calcmode="lin" valueType="num">
+                                      <p:cBhvr additive="base">
+                                        <p:cTn id="22" dur="500" fill="hold"/>
+                                        <p:tgtEl>
+                                          <p:spTgt spid="39947"/>
+                                        </p:tgtEl>
+                                        <p:attrNameLst>
+                                          <p:attrName>ppt_y</p:attrName>
+                                        </p:attrNameLst>
+                                      </p:cBhvr>
+                                      <p:tavLst>
+                                        <p:tav tm="0">
+                                          <p:val>
+                                            <p:strVal val="1+#ppt_h/2"/>
+                                          </p:val>
+                                        </p:tav>
+                                        <p:tav tm="100000">
+                                          <p:val>
+                                            <p:strVal val="#ppt_y"/>
+                                          </p:val>
+                                        </p:tav>
+                                      </p:tavLst>
+                                    </p:anim>
+                                  </p:childTnLst>
+                                </p:cTn>
+                              </p:par>
+                            </p:childTnLst>
+                          </p:cTn>
+                        </p:par>
+                      </p:childTnLst>
+                    </p:cTn>
+                  </p:par>
+                  <p:par>
+                    <p:cTn id="23" fill="hold">
+                      <p:stCondLst>
+                        <p:cond delay="indefinite"/>
+                      </p:stCondLst>
+                      <p:childTnLst>
+                        <p:par>
+                          <p:cTn id="24" fill="hold">
+                            <p:stCondLst>
+                              <p:cond delay="0"/>
+                            </p:stCondLst>
+                            <p:childTnLst>
+                              <p:par>
+                                <p:cTn id="25" presetID="2" presetClass="entr" presetSubtype="4" fill="hold" grpId="0" nodeType="clickEffect">
+                                  <p:stCondLst>
+                                    <p:cond delay="0"/>
+                                  </p:stCondLst>
+                                  <p:childTnLst>
+                                    <p:set>
+                                      <p:cBhvr>
+                                        <p:cTn id="26" dur="1" fill="hold">
+                                          <p:stCondLst>
+                                            <p:cond delay="0"/>
+                                          </p:stCondLst>
+                                        </p:cTn>
+                                        <p:tgtEl>
+                                          <p:spTgt spid="10"/>
+                                        </p:tgtEl>
+                                        <p:attrNameLst>
+                                          <p:attrName>style.visibility</p:attrName>
+                                        </p:attrNameLst>
+                                      </p:cBhvr>
+                                      <p:to>
+                                        <p:strVal val="visible"/>
+                                      </p:to>
+                                    </p:set>
+                                    <p:anim calcmode="lin" valueType="num">
+                                      <p:cBhvr additive="base">
+                                        <p:cTn id="27" dur="500" fill="hold"/>
+                                        <p:tgtEl>
+                                          <p:spTgt spid="10"/>
+                                        </p:tgtEl>
+                                        <p:attrNameLst>
+                                          <p:attrName>ppt_x</p:attrName>
+                                        </p:attrNameLst>
+                                      </p:cBhvr>
+                                      <p:tavLst>
+                                        <p:tav tm="0">
+                                          <p:val>
+                                            <p:strVal val="#ppt_x"/>
+                                          </p:val>
+                                        </p:tav>
+                                        <p:tav tm="100000">
+                                          <p:val>
+                                            <p:strVal val="#ppt_x"/>
+                                          </p:val>
+                                        </p:tav>
+                                      </p:tavLst>
+                                    </p:anim>
+                                    <p:anim calcmode="lin" valueType="num">
+                                      <p:cBhvr additive="base">
+                                        <p:cTn id="28" dur="500" fill="hold"/>
+                                        <p:tgtEl>
+                                          <p:spTgt spid="10"/>
+                                        </p:tgtEl>
+                                        <p:attrNameLst>
+                                          <p:attrName>ppt_y</p:attrName>
+                                        </p:attrNameLst>
+                                      </p:cBhvr>
+                                      <p:tavLst>
+                                        <p:tav tm="0">
+                                          <p:val>
+                                            <p:strVal val="1+#ppt_h/2"/>
+                                          </p:val>
+                                        </p:tav>
+                                        <p:tav tm="100000">
+                                          <p:val>
+                                            <p:strVal val="#ppt_y"/>
+                                          </p:val>
+                                        </p:tav>
+                                      </p:tavLst>
+                                    </p:anim>
+                                  </p:childTnLst>
+                                </p:cTn>
+                              </p:par>
+                            </p:childTnLst>
+                          </p:cTn>
+                        </p:par>
+                      </p:childTnLst>
+                    </p:cTn>
+                  </p:par>
+                  <p:par>
+                    <p:cTn id="29" fill="hold">
+                      <p:stCondLst>
+                        <p:cond delay="indefinite"/>
+                      </p:stCondLst>
+                      <p:childTnLst>
+                        <p:par>
+                          <p:cTn id="30" fill="hold">
+                            <p:stCondLst>
+                              <p:cond delay="0"/>
+                            </p:stCondLst>
+                            <p:childTnLst>
+                              <p:par>
+                                <p:cTn id="31" presetID="49" presetClass="entr" presetSubtype="0" decel="100000" fill="hold" nodeType="clickEffect">
+                                  <p:stCondLst>
+                                    <p:cond delay="0"/>
+                                  </p:stCondLst>
+                                  <p:childTnLst>
+                                    <p:set>
+                                      <p:cBhvr>
+                                        <p:cTn id="32" dur="1" fill="hold">
                                           <p:stCondLst>
                                             <p:cond delay="0"/>
                                           </p:stCondLst>
@@ -34838,7 +36398,7 @@
                                     </p:set>
                                     <p:anim calcmode="lin" valueType="num">
                                       <p:cBhvr>
-                                        <p:cTn id="15" dur="500" fill="hold"/>
+                                        <p:cTn id="33" dur="500" fill="hold"/>
                                         <p:tgtEl>
                                           <p:spTgt spid="9"/>
                                         </p:tgtEl>
@@ -34861,7 +36421,7 @@
                                     </p:anim>
                                     <p:anim calcmode="lin" valueType="num">
                                       <p:cBhvr>
-                                        <p:cTn id="16" dur="500" fill="hold"/>
+                                        <p:cTn id="34" dur="500" fill="hold"/>
                                         <p:tgtEl>
                                           <p:spTgt spid="9"/>
                                         </p:tgtEl>
@@ -34884,7 +36444,7 @@
                                     </p:anim>
                                     <p:anim calcmode="lin" valueType="num">
                                       <p:cBhvr>
-                                        <p:cTn id="17" dur="500" fill="hold"/>
+                                        <p:cTn id="35" dur="500" fill="hold"/>
                                         <p:tgtEl>
                                           <p:spTgt spid="9"/>
                                         </p:tgtEl>
@@ -34907,12 +36467,431 @@
                                     </p:anim>
                                     <p:animEffect transition="in" filter="fade">
                                       <p:cBhvr>
-                                        <p:cTn id="18" dur="500"/>
+                                        <p:cTn id="36" dur="500"/>
                                         <p:tgtEl>
                                           <p:spTgt spid="9"/>
                                         </p:tgtEl>
                                       </p:cBhvr>
                                     </p:animEffect>
+                                  </p:childTnLst>
+                                </p:cTn>
+                              </p:par>
+                            </p:childTnLst>
+                          </p:cTn>
+                        </p:par>
+                      </p:childTnLst>
+                    </p:cTn>
+                  </p:par>
+                  <p:par>
+                    <p:cTn id="37" fill="hold">
+                      <p:stCondLst>
+                        <p:cond delay="indefinite"/>
+                      </p:stCondLst>
+                      <p:childTnLst>
+                        <p:par>
+                          <p:cTn id="38" fill="hold">
+                            <p:stCondLst>
+                              <p:cond delay="0"/>
+                            </p:stCondLst>
+                            <p:childTnLst>
+                              <p:par>
+                                <p:cTn id="39" presetID="2" presetClass="entr" presetSubtype="4" fill="hold" grpId="0" nodeType="clickEffect">
+                                  <p:stCondLst>
+                                    <p:cond delay="0"/>
+                                  </p:stCondLst>
+                                  <p:childTnLst>
+                                    <p:set>
+                                      <p:cBhvr>
+                                        <p:cTn id="40" dur="1" fill="hold">
+                                          <p:stCondLst>
+                                            <p:cond delay="0"/>
+                                          </p:stCondLst>
+                                        </p:cTn>
+                                        <p:tgtEl>
+                                          <p:spTgt spid="12"/>
+                                        </p:tgtEl>
+                                        <p:attrNameLst>
+                                          <p:attrName>style.visibility</p:attrName>
+                                        </p:attrNameLst>
+                                      </p:cBhvr>
+                                      <p:to>
+                                        <p:strVal val="visible"/>
+                                      </p:to>
+                                    </p:set>
+                                    <p:anim calcmode="lin" valueType="num">
+                                      <p:cBhvr additive="base">
+                                        <p:cTn id="41" dur="500" fill="hold"/>
+                                        <p:tgtEl>
+                                          <p:spTgt spid="12"/>
+                                        </p:tgtEl>
+                                        <p:attrNameLst>
+                                          <p:attrName>ppt_x</p:attrName>
+                                        </p:attrNameLst>
+                                      </p:cBhvr>
+                                      <p:tavLst>
+                                        <p:tav tm="0">
+                                          <p:val>
+                                            <p:strVal val="#ppt_x"/>
+                                          </p:val>
+                                        </p:tav>
+                                        <p:tav tm="100000">
+                                          <p:val>
+                                            <p:strVal val="#ppt_x"/>
+                                          </p:val>
+                                        </p:tav>
+                                      </p:tavLst>
+                                    </p:anim>
+                                    <p:anim calcmode="lin" valueType="num">
+                                      <p:cBhvr additive="base">
+                                        <p:cTn id="42" dur="500" fill="hold"/>
+                                        <p:tgtEl>
+                                          <p:spTgt spid="12"/>
+                                        </p:tgtEl>
+                                        <p:attrNameLst>
+                                          <p:attrName>ppt_y</p:attrName>
+                                        </p:attrNameLst>
+                                      </p:cBhvr>
+                                      <p:tavLst>
+                                        <p:tav tm="0">
+                                          <p:val>
+                                            <p:strVal val="1+#ppt_h/2"/>
+                                          </p:val>
+                                        </p:tav>
+                                        <p:tav tm="100000">
+                                          <p:val>
+                                            <p:strVal val="#ppt_y"/>
+                                          </p:val>
+                                        </p:tav>
+                                      </p:tavLst>
+                                    </p:anim>
+                                  </p:childTnLst>
+                                </p:cTn>
+                              </p:par>
+                            </p:childTnLst>
+                          </p:cTn>
+                        </p:par>
+                      </p:childTnLst>
+                    </p:cTn>
+                  </p:par>
+                  <p:par>
+                    <p:cTn id="43" fill="hold">
+                      <p:stCondLst>
+                        <p:cond delay="indefinite"/>
+                      </p:stCondLst>
+                      <p:childTnLst>
+                        <p:par>
+                          <p:cTn id="44" fill="hold">
+                            <p:stCondLst>
+                              <p:cond delay="0"/>
+                            </p:stCondLst>
+                            <p:childTnLst>
+                              <p:par>
+                                <p:cTn id="45" presetID="2" presetClass="entr" presetSubtype="4" fill="hold" grpId="0" nodeType="clickEffect">
+                                  <p:stCondLst>
+                                    <p:cond delay="0"/>
+                                  </p:stCondLst>
+                                  <p:childTnLst>
+                                    <p:set>
+                                      <p:cBhvr>
+                                        <p:cTn id="46" dur="1" fill="hold">
+                                          <p:stCondLst>
+                                            <p:cond delay="0"/>
+                                          </p:stCondLst>
+                                        </p:cTn>
+                                        <p:tgtEl>
+                                          <p:spTgt spid="39944"/>
+                                        </p:tgtEl>
+                                        <p:attrNameLst>
+                                          <p:attrName>style.visibility</p:attrName>
+                                        </p:attrNameLst>
+                                      </p:cBhvr>
+                                      <p:to>
+                                        <p:strVal val="visible"/>
+                                      </p:to>
+                                    </p:set>
+                                    <p:anim calcmode="lin" valueType="num">
+                                      <p:cBhvr additive="base">
+                                        <p:cTn id="47" dur="500" fill="hold"/>
+                                        <p:tgtEl>
+                                          <p:spTgt spid="39944"/>
+                                        </p:tgtEl>
+                                        <p:attrNameLst>
+                                          <p:attrName>ppt_x</p:attrName>
+                                        </p:attrNameLst>
+                                      </p:cBhvr>
+                                      <p:tavLst>
+                                        <p:tav tm="0">
+                                          <p:val>
+                                            <p:strVal val="#ppt_x"/>
+                                          </p:val>
+                                        </p:tav>
+                                        <p:tav tm="100000">
+                                          <p:val>
+                                            <p:strVal val="#ppt_x"/>
+                                          </p:val>
+                                        </p:tav>
+                                      </p:tavLst>
+                                    </p:anim>
+                                    <p:anim calcmode="lin" valueType="num">
+                                      <p:cBhvr additive="base">
+                                        <p:cTn id="48" dur="500" fill="hold"/>
+                                        <p:tgtEl>
+                                          <p:spTgt spid="39944"/>
+                                        </p:tgtEl>
+                                        <p:attrNameLst>
+                                          <p:attrName>ppt_y</p:attrName>
+                                        </p:attrNameLst>
+                                      </p:cBhvr>
+                                      <p:tavLst>
+                                        <p:tav tm="0">
+                                          <p:val>
+                                            <p:strVal val="1+#ppt_h/2"/>
+                                          </p:val>
+                                        </p:tav>
+                                        <p:tav tm="100000">
+                                          <p:val>
+                                            <p:strVal val="#ppt_y"/>
+                                          </p:val>
+                                        </p:tav>
+                                      </p:tavLst>
+                                    </p:anim>
+                                  </p:childTnLst>
+                                </p:cTn>
+                              </p:par>
+                              <p:par>
+                                <p:cTn id="49" presetID="2" presetClass="entr" presetSubtype="4" fill="hold" grpId="0" nodeType="withEffect">
+                                  <p:stCondLst>
+                                    <p:cond delay="0"/>
+                                  </p:stCondLst>
+                                  <p:childTnLst>
+                                    <p:set>
+                                      <p:cBhvr>
+                                        <p:cTn id="50" dur="1" fill="hold">
+                                          <p:stCondLst>
+                                            <p:cond delay="0"/>
+                                          </p:stCondLst>
+                                        </p:cTn>
+                                        <p:tgtEl>
+                                          <p:spTgt spid="4"/>
+                                        </p:tgtEl>
+                                        <p:attrNameLst>
+                                          <p:attrName>style.visibility</p:attrName>
+                                        </p:attrNameLst>
+                                      </p:cBhvr>
+                                      <p:to>
+                                        <p:strVal val="visible"/>
+                                      </p:to>
+                                    </p:set>
+                                    <p:anim calcmode="lin" valueType="num">
+                                      <p:cBhvr additive="base">
+                                        <p:cTn id="51" dur="500" fill="hold"/>
+                                        <p:tgtEl>
+                                          <p:spTgt spid="4"/>
+                                        </p:tgtEl>
+                                        <p:attrNameLst>
+                                          <p:attrName>ppt_x</p:attrName>
+                                        </p:attrNameLst>
+                                      </p:cBhvr>
+                                      <p:tavLst>
+                                        <p:tav tm="0">
+                                          <p:val>
+                                            <p:strVal val="#ppt_x"/>
+                                          </p:val>
+                                        </p:tav>
+                                        <p:tav tm="100000">
+                                          <p:val>
+                                            <p:strVal val="#ppt_x"/>
+                                          </p:val>
+                                        </p:tav>
+                                      </p:tavLst>
+                                    </p:anim>
+                                    <p:anim calcmode="lin" valueType="num">
+                                      <p:cBhvr additive="base">
+                                        <p:cTn id="52" dur="500" fill="hold"/>
+                                        <p:tgtEl>
+                                          <p:spTgt spid="4"/>
+                                        </p:tgtEl>
+                                        <p:attrNameLst>
+                                          <p:attrName>ppt_y</p:attrName>
+                                        </p:attrNameLst>
+                                      </p:cBhvr>
+                                      <p:tavLst>
+                                        <p:tav tm="0">
+                                          <p:val>
+                                            <p:strVal val="1+#ppt_h/2"/>
+                                          </p:val>
+                                        </p:tav>
+                                        <p:tav tm="100000">
+                                          <p:val>
+                                            <p:strVal val="#ppt_y"/>
+                                          </p:val>
+                                        </p:tav>
+                                      </p:tavLst>
+                                    </p:anim>
+                                  </p:childTnLst>
+                                </p:cTn>
+                              </p:par>
+                            </p:childTnLst>
+                          </p:cTn>
+                        </p:par>
+                      </p:childTnLst>
+                    </p:cTn>
+                  </p:par>
+                  <p:par>
+                    <p:cTn id="53" fill="hold">
+                      <p:stCondLst>
+                        <p:cond delay="indefinite"/>
+                      </p:stCondLst>
+                      <p:childTnLst>
+                        <p:par>
+                          <p:cTn id="54" fill="hold">
+                            <p:stCondLst>
+                              <p:cond delay="0"/>
+                            </p:stCondLst>
+                            <p:childTnLst>
+                              <p:par>
+                                <p:cTn id="55" presetID="2" presetClass="entr" presetSubtype="4" fill="hold" grpId="0" nodeType="clickEffect">
+                                  <p:stCondLst>
+                                    <p:cond delay="0"/>
+                                  </p:stCondLst>
+                                  <p:childTnLst>
+                                    <p:set>
+                                      <p:cBhvr>
+                                        <p:cTn id="56" dur="1" fill="hold">
+                                          <p:stCondLst>
+                                            <p:cond delay="0"/>
+                                          </p:stCondLst>
+                                        </p:cTn>
+                                        <p:tgtEl>
+                                          <p:spTgt spid="7"/>
+                                        </p:tgtEl>
+                                        <p:attrNameLst>
+                                          <p:attrName>style.visibility</p:attrName>
+                                        </p:attrNameLst>
+                                      </p:cBhvr>
+                                      <p:to>
+                                        <p:strVal val="visible"/>
+                                      </p:to>
+                                    </p:set>
+                                    <p:anim calcmode="lin" valueType="num">
+                                      <p:cBhvr additive="base">
+                                        <p:cTn id="57" dur="500" fill="hold"/>
+                                        <p:tgtEl>
+                                          <p:spTgt spid="7"/>
+                                        </p:tgtEl>
+                                        <p:attrNameLst>
+                                          <p:attrName>ppt_x</p:attrName>
+                                        </p:attrNameLst>
+                                      </p:cBhvr>
+                                      <p:tavLst>
+                                        <p:tav tm="0">
+                                          <p:val>
+                                            <p:strVal val="#ppt_x"/>
+                                          </p:val>
+                                        </p:tav>
+                                        <p:tav tm="100000">
+                                          <p:val>
+                                            <p:strVal val="#ppt_x"/>
+                                          </p:val>
+                                        </p:tav>
+                                      </p:tavLst>
+                                    </p:anim>
+                                    <p:anim calcmode="lin" valueType="num">
+                                      <p:cBhvr additive="base">
+                                        <p:cTn id="58" dur="500" fill="hold"/>
+                                        <p:tgtEl>
+                                          <p:spTgt spid="7"/>
+                                        </p:tgtEl>
+                                        <p:attrNameLst>
+                                          <p:attrName>ppt_y</p:attrName>
+                                        </p:attrNameLst>
+                                      </p:cBhvr>
+                                      <p:tavLst>
+                                        <p:tav tm="0">
+                                          <p:val>
+                                            <p:strVal val="1+#ppt_h/2"/>
+                                          </p:val>
+                                        </p:tav>
+                                        <p:tav tm="100000">
+                                          <p:val>
+                                            <p:strVal val="#ppt_y"/>
+                                          </p:val>
+                                        </p:tav>
+                                      </p:tavLst>
+                                    </p:anim>
+                                  </p:childTnLst>
+                                </p:cTn>
+                              </p:par>
+                              <p:par>
+                                <p:cTn id="59" presetID="2" presetClass="entr" presetSubtype="4" fill="hold" grpId="0" nodeType="withEffect">
+                                  <p:stCondLst>
+                                    <p:cond delay="0"/>
+                                  </p:stCondLst>
+                                  <p:childTnLst>
+                                    <p:set>
+                                      <p:cBhvr>
+                                        <p:cTn id="60" dur="1" fill="hold">
+                                          <p:stCondLst>
+                                            <p:cond delay="0"/>
+                                          </p:stCondLst>
+                                        </p:cTn>
+                                        <p:tgtEl>
+                                          <p:spTgt spid="15"/>
+                                        </p:tgtEl>
+                                        <p:attrNameLst>
+                                          <p:attrName>style.visibility</p:attrName>
+                                        </p:attrNameLst>
+                                      </p:cBhvr>
+                                      <p:to>
+                                        <p:strVal val="visible"/>
+                                      </p:to>
+                                    </p:set>
+                                    <p:anim calcmode="lin" valueType="num">
+                                      <p:cBhvr additive="base">
+                                        <p:cTn id="61" dur="500" fill="hold"/>
+                                        <p:tgtEl>
+                                          <p:spTgt spid="15"/>
+                                        </p:tgtEl>
+                                        <p:attrNameLst>
+                                          <p:attrName>ppt_x</p:attrName>
+                                        </p:attrNameLst>
+                                      </p:cBhvr>
+                                      <p:tavLst>
+                                        <p:tav tm="0">
+                                          <p:val>
+                                            <p:strVal val="#ppt_x"/>
+                                          </p:val>
+                                        </p:tav>
+                                        <p:tav tm="100000">
+                                          <p:val>
+                                            <p:strVal val="#ppt_x"/>
+                                          </p:val>
+                                        </p:tav>
+                                      </p:tavLst>
+                                    </p:anim>
+                                    <p:anim calcmode="lin" valueType="num">
+                                      <p:cBhvr additive="base">
+                                        <p:cTn id="62" dur="500" fill="hold"/>
+                                        <p:tgtEl>
+                                          <p:spTgt spid="15"/>
+                                        </p:tgtEl>
+                                        <p:attrNameLst>
+                                          <p:attrName>ppt_y</p:attrName>
+                                        </p:attrNameLst>
+                                      </p:cBhvr>
+                                      <p:tavLst>
+                                        <p:tav tm="0">
+                                          <p:val>
+                                            <p:strVal val="1+#ppt_h/2"/>
+                                          </p:val>
+                                        </p:tav>
+                                        <p:tav tm="100000">
+                                          <p:val>
+                                            <p:strVal val="#ppt_y"/>
+                                          </p:val>
+                                        </p:tav>
+                                      </p:tavLst>
+                                    </p:anim>
                                   </p:childTnLst>
                                 </p:cTn>
                               </p:par>
@@ -34943,6 +36922,24 @@
         </p:cTn>
       </p:par>
     </p:tnLst>
+    <p:bldLst>
+      <p:bldP spid="39947" grpId="0" animBg="1"/>
+      <p:bldP spid="39947" grpId="1" animBg="1"/>
+      <p:bldP spid="12" grpId="0" animBg="1"/>
+      <p:bldP spid="12" grpId="1" animBg="1"/>
+      <p:bldP spid="39944" grpId="0" animBg="1"/>
+      <p:bldP spid="4" grpId="0"/>
+      <p:bldP spid="39944" grpId="1" animBg="1"/>
+      <p:bldP spid="4" grpId="1"/>
+      <p:bldP spid="7" grpId="0"/>
+      <p:bldP spid="15" grpId="0" animBg="1"/>
+      <p:bldP spid="7" grpId="1"/>
+      <p:bldP spid="15" grpId="1" animBg="1"/>
+      <p:bldP spid="39946" grpId="0"/>
+      <p:bldP spid="39946" grpId="1"/>
+      <p:bldP spid="10" grpId="0"/>
+      <p:bldP spid="10" grpId="1"/>
+    </p:bldLst>
   </p:timing>
 </p:sld>
 </file>
@@ -37527,39 +39524,21 @@
                                   </p:childTnLst>
                                 </p:cTn>
                               </p:par>
-                            </p:childTnLst>
-                          </p:cTn>
-                        </p:par>
-                      </p:childTnLst>
-                    </p:cTn>
-                  </p:par>
-                  <p:par>
-                    <p:cTn id="9" fill="hold">
-                      <p:stCondLst>
-                        <p:cond delay="indefinite"/>
-                      </p:stCondLst>
-                      <p:childTnLst>
-                        <p:par>
-                          <p:cTn id="10" fill="hold">
-                            <p:stCondLst>
-                              <p:cond delay="0"/>
-                            </p:stCondLst>
-                            <p:childTnLst>
                               <p:par>
-                                <p:cTn id="11" presetID="2" presetClass="entr" presetSubtype="4" fill="hold" grpId="0" nodeType="clickEffect">
+                                <p:cTn id="9" presetID="2" presetClass="entr" presetSubtype="4" fill="hold" grpId="0" nodeType="withEffect">
                                   <p:stCondLst>
                                     <p:cond delay="0"/>
                                   </p:stCondLst>
                                   <p:childTnLst>
                                     <p:set>
                                       <p:cBhvr>
-                                        <p:cTn id="12" dur="1" fill="hold">
+                                        <p:cTn id="10" dur="1" fill="hold">
                                           <p:stCondLst>
                                             <p:cond delay="0"/>
                                           </p:stCondLst>
                                         </p:cTn>
                                         <p:tgtEl>
-                                          <p:spTgt spid="38919"/>
+                                          <p:spTgt spid="38914"/>
                                         </p:tgtEl>
                                         <p:attrNameLst>
                                           <p:attrName>style.visibility</p:attrName>
@@ -37571,9 +39550,9 @@
                                     </p:set>
                                     <p:anim calcmode="lin" valueType="num">
                                       <p:cBhvr additive="base">
-                                        <p:cTn id="13" dur="500" fill="hold"/>
+                                        <p:cTn id="11" dur="500" fill="hold"/>
                                         <p:tgtEl>
-                                          <p:spTgt spid="38919"/>
+                                          <p:spTgt spid="38914"/>
                                         </p:tgtEl>
                                         <p:attrNameLst>
                                           <p:attrName>ppt_x</p:attrName>
@@ -37594,9 +39573,9 @@
                                     </p:anim>
                                     <p:anim calcmode="lin" valueType="num">
                                       <p:cBhvr additive="base">
-                                        <p:cTn id="14" dur="500" fill="hold"/>
+                                        <p:cTn id="12" dur="500" fill="hold"/>
                                         <p:tgtEl>
-                                          <p:spTgt spid="38919"/>
+                                          <p:spTgt spid="38914"/>
                                         </p:tgtEl>
                                         <p:attrNameLst>
                                           <p:attrName>ppt_y</p:attrName>
@@ -37625,26 +39604,190 @@
                     </p:cTn>
                   </p:par>
                   <p:par>
-                    <p:cTn id="15" fill="hold">
+                    <p:cTn id="13" fill="hold">
                       <p:stCondLst>
                         <p:cond delay="indefinite"/>
                       </p:stCondLst>
                       <p:childTnLst>
                         <p:par>
-                          <p:cTn id="16" fill="hold">
+                          <p:cTn id="14" fill="hold">
                             <p:stCondLst>
                               <p:cond delay="0"/>
                             </p:stCondLst>
                             <p:childTnLst>
                               <p:par>
-                                <p:cTn id="17" presetID="22" presetClass="entr" presetSubtype="4" fill="hold" nodeType="clickEffect">
+                                <p:cTn id="15" presetID="2" presetClass="entr" presetSubtype="4" fill="hold" grpId="0" nodeType="clickEffect">
                                   <p:stCondLst>
                                     <p:cond delay="0"/>
                                   </p:stCondLst>
                                   <p:childTnLst>
                                     <p:set>
                                       <p:cBhvr>
-                                        <p:cTn id="18" dur="1" fill="hold">
+                                        <p:cTn id="16" dur="1" fill="hold">
+                                          <p:stCondLst>
+                                            <p:cond delay="0"/>
+                                          </p:stCondLst>
+                                        </p:cTn>
+                                        <p:tgtEl>
+                                          <p:spTgt spid="38919"/>
+                                        </p:tgtEl>
+                                        <p:attrNameLst>
+                                          <p:attrName>style.visibility</p:attrName>
+                                        </p:attrNameLst>
+                                      </p:cBhvr>
+                                      <p:to>
+                                        <p:strVal val="visible"/>
+                                      </p:to>
+                                    </p:set>
+                                    <p:anim calcmode="lin" valueType="num">
+                                      <p:cBhvr additive="base">
+                                        <p:cTn id="17" dur="500" fill="hold"/>
+                                        <p:tgtEl>
+                                          <p:spTgt spid="38919"/>
+                                        </p:tgtEl>
+                                        <p:attrNameLst>
+                                          <p:attrName>ppt_x</p:attrName>
+                                        </p:attrNameLst>
+                                      </p:cBhvr>
+                                      <p:tavLst>
+                                        <p:tav tm="0">
+                                          <p:val>
+                                            <p:strVal val="#ppt_x"/>
+                                          </p:val>
+                                        </p:tav>
+                                        <p:tav tm="100000">
+                                          <p:val>
+                                            <p:strVal val="#ppt_x"/>
+                                          </p:val>
+                                        </p:tav>
+                                      </p:tavLst>
+                                    </p:anim>
+                                    <p:anim calcmode="lin" valueType="num">
+                                      <p:cBhvr additive="base">
+                                        <p:cTn id="18" dur="500" fill="hold"/>
+                                        <p:tgtEl>
+                                          <p:spTgt spid="38919"/>
+                                        </p:tgtEl>
+                                        <p:attrNameLst>
+                                          <p:attrName>ppt_y</p:attrName>
+                                        </p:attrNameLst>
+                                      </p:cBhvr>
+                                      <p:tavLst>
+                                        <p:tav tm="0">
+                                          <p:val>
+                                            <p:strVal val="1+#ppt_h/2"/>
+                                          </p:val>
+                                        </p:tav>
+                                        <p:tav tm="100000">
+                                          <p:val>
+                                            <p:strVal val="#ppt_y"/>
+                                          </p:val>
+                                        </p:tav>
+                                      </p:tavLst>
+                                    </p:anim>
+                                  </p:childTnLst>
+                                </p:cTn>
+                              </p:par>
+                              <p:par>
+                                <p:cTn id="19" presetID="2" presetClass="entr" presetSubtype="4" fill="hold" grpId="0" nodeType="withEffect">
+                                  <p:stCondLst>
+                                    <p:cond delay="0"/>
+                                  </p:stCondLst>
+                                  <p:childTnLst>
+                                    <p:set>
+                                      <p:cBhvr>
+                                        <p:cTn id="20" dur="1" fill="hold">
+                                          <p:stCondLst>
+                                            <p:cond delay="0"/>
+                                          </p:stCondLst>
+                                        </p:cTn>
+                                        <p:tgtEl>
+                                          <p:spTgt spid="38916"/>
+                                        </p:tgtEl>
+                                        <p:attrNameLst>
+                                          <p:attrName>style.visibility</p:attrName>
+                                        </p:attrNameLst>
+                                      </p:cBhvr>
+                                      <p:to>
+                                        <p:strVal val="visible"/>
+                                      </p:to>
+                                    </p:set>
+                                    <p:anim calcmode="lin" valueType="num">
+                                      <p:cBhvr additive="base">
+                                        <p:cTn id="21" dur="500" fill="hold"/>
+                                        <p:tgtEl>
+                                          <p:spTgt spid="38916"/>
+                                        </p:tgtEl>
+                                        <p:attrNameLst>
+                                          <p:attrName>ppt_x</p:attrName>
+                                        </p:attrNameLst>
+                                      </p:cBhvr>
+                                      <p:tavLst>
+                                        <p:tav tm="0">
+                                          <p:val>
+                                            <p:strVal val="#ppt_x"/>
+                                          </p:val>
+                                        </p:tav>
+                                        <p:tav tm="100000">
+                                          <p:val>
+                                            <p:strVal val="#ppt_x"/>
+                                          </p:val>
+                                        </p:tav>
+                                      </p:tavLst>
+                                    </p:anim>
+                                    <p:anim calcmode="lin" valueType="num">
+                                      <p:cBhvr additive="base">
+                                        <p:cTn id="22" dur="500" fill="hold"/>
+                                        <p:tgtEl>
+                                          <p:spTgt spid="38916"/>
+                                        </p:tgtEl>
+                                        <p:attrNameLst>
+                                          <p:attrName>ppt_y</p:attrName>
+                                        </p:attrNameLst>
+                                      </p:cBhvr>
+                                      <p:tavLst>
+                                        <p:tav tm="0">
+                                          <p:val>
+                                            <p:strVal val="1+#ppt_h/2"/>
+                                          </p:val>
+                                        </p:tav>
+                                        <p:tav tm="100000">
+                                          <p:val>
+                                            <p:strVal val="#ppt_y"/>
+                                          </p:val>
+                                        </p:tav>
+                                      </p:tavLst>
+                                    </p:anim>
+                                  </p:childTnLst>
+                                </p:cTn>
+                              </p:par>
+                            </p:childTnLst>
+                          </p:cTn>
+                        </p:par>
+                      </p:childTnLst>
+                    </p:cTn>
+                  </p:par>
+                  <p:par>
+                    <p:cTn id="23" fill="hold">
+                      <p:stCondLst>
+                        <p:cond delay="indefinite"/>
+                      </p:stCondLst>
+                      <p:childTnLst>
+                        <p:par>
+                          <p:cTn id="24" fill="hold">
+                            <p:stCondLst>
+                              <p:cond delay="0"/>
+                            </p:stCondLst>
+                            <p:childTnLst>
+                              <p:par>
+                                <p:cTn id="25" presetID="22" presetClass="entr" presetSubtype="4" fill="hold" nodeType="clickEffect">
+                                  <p:stCondLst>
+                                    <p:cond delay="0"/>
+                                  </p:stCondLst>
+                                  <p:childTnLst>
+                                    <p:set>
+                                      <p:cBhvr>
+                                        <p:cTn id="26" dur="1" fill="hold">
                                           <p:stCondLst>
                                             <p:cond delay="0"/>
                                           </p:stCondLst>
@@ -37666,7 +39809,7 @@
                                     </p:set>
                                     <p:animEffect transition="in" filter="wipe(down)">
                                       <p:cBhvr>
-                                        <p:cTn id="19" dur="500"/>
+                                        <p:cTn id="27" dur="500"/>
                                         <p:tgtEl>
                                           <p:spTgt spid="38950">
                                             <p:txEl>
@@ -37686,26 +39829,26 @@
                     </p:cTn>
                   </p:par>
                   <p:par>
-                    <p:cTn id="20" fill="hold">
+                    <p:cTn id="28" fill="hold">
                       <p:stCondLst>
                         <p:cond delay="indefinite"/>
                       </p:stCondLst>
                       <p:childTnLst>
                         <p:par>
-                          <p:cTn id="21" fill="hold">
+                          <p:cTn id="29" fill="hold">
                             <p:stCondLst>
                               <p:cond delay="0"/>
                             </p:stCondLst>
                             <p:childTnLst>
                               <p:par>
-                                <p:cTn id="22" presetID="2" presetClass="entr" presetSubtype="4" fill="hold" grpId="0" nodeType="clickEffect">
+                                <p:cTn id="30" presetID="2" presetClass="entr" presetSubtype="4" fill="hold" grpId="0" nodeType="clickEffect">
                                   <p:stCondLst>
                                     <p:cond delay="0"/>
                                   </p:stCondLst>
                                   <p:childTnLst>
                                     <p:set>
                                       <p:cBhvr>
-                                        <p:cTn id="23" dur="1" fill="hold">
+                                        <p:cTn id="31" dur="1" fill="hold">
                                           <p:stCondLst>
                                             <p:cond delay="0"/>
                                           </p:stCondLst>
@@ -37723,7 +39866,7 @@
                                     </p:set>
                                     <p:anim calcmode="lin" valueType="num">
                                       <p:cBhvr additive="base">
-                                        <p:cTn id="24" dur="500" fill="hold"/>
+                                        <p:cTn id="32" dur="500" fill="hold"/>
                                         <p:tgtEl>
                                           <p:spTgt spid="38917"/>
                                         </p:tgtEl>
@@ -37746,7 +39889,7 @@
                                     </p:anim>
                                     <p:anim calcmode="lin" valueType="num">
                                       <p:cBhvr additive="base">
-                                        <p:cTn id="25" dur="500" fill="hold"/>
+                                        <p:cTn id="33" dur="500" fill="hold"/>
                                         <p:tgtEl>
                                           <p:spTgt spid="38917"/>
                                         </p:tgtEl>
@@ -37777,26 +39920,26 @@
                     </p:cTn>
                   </p:par>
                   <p:par>
-                    <p:cTn id="26" fill="hold">
+                    <p:cTn id="34" fill="hold">
                       <p:stCondLst>
                         <p:cond delay="indefinite"/>
                       </p:stCondLst>
                       <p:childTnLst>
                         <p:par>
-                          <p:cTn id="27" fill="hold">
+                          <p:cTn id="35" fill="hold">
                             <p:stCondLst>
                               <p:cond delay="0"/>
                             </p:stCondLst>
                             <p:childTnLst>
                               <p:par>
-                                <p:cTn id="28" presetID="22" presetClass="entr" presetSubtype="4" fill="hold" grpId="0" nodeType="clickEffect">
+                                <p:cTn id="36" presetID="22" presetClass="entr" presetSubtype="4" fill="hold" grpId="0" nodeType="clickEffect">
                                   <p:stCondLst>
                                     <p:cond delay="0"/>
                                   </p:stCondLst>
                                   <p:childTnLst>
                                     <p:set>
                                       <p:cBhvr>
-                                        <p:cTn id="29" dur="1" fill="hold">
+                                        <p:cTn id="37" dur="1" fill="hold">
                                           <p:stCondLst>
                                             <p:cond delay="0"/>
                                           </p:stCondLst>
@@ -37814,7 +39957,7 @@
                                     </p:set>
                                     <p:animEffect transition="in" filter="wipe(down)">
                                       <p:cBhvr>
-                                        <p:cTn id="30" dur="500"/>
+                                        <p:cTn id="38" dur="500"/>
                                         <p:tgtEl>
                                           <p:spTgt spid="14"/>
                                         </p:tgtEl>
@@ -37830,26 +39973,26 @@
                     </p:cTn>
                   </p:par>
                   <p:par>
-                    <p:cTn id="31" fill="hold">
+                    <p:cTn id="39" fill="hold">
                       <p:stCondLst>
                         <p:cond delay="indefinite"/>
                       </p:stCondLst>
                       <p:childTnLst>
                         <p:par>
-                          <p:cTn id="32" fill="hold">
+                          <p:cTn id="40" fill="hold">
                             <p:stCondLst>
                               <p:cond delay="0"/>
                             </p:stCondLst>
                             <p:childTnLst>
                               <p:par>
-                                <p:cTn id="33" presetID="22" presetClass="entr" presetSubtype="4" fill="hold" grpId="0" nodeType="clickEffect">
+                                <p:cTn id="41" presetID="22" presetClass="entr" presetSubtype="4" fill="hold" grpId="0" nodeType="clickEffect">
                                   <p:stCondLst>
                                     <p:cond delay="0"/>
                                   </p:stCondLst>
                                   <p:childTnLst>
                                     <p:set>
                                       <p:cBhvr>
-                                        <p:cTn id="34" dur="1" fill="hold">
+                                        <p:cTn id="42" dur="1" fill="hold">
                                           <p:stCondLst>
                                             <p:cond delay="0"/>
                                           </p:stCondLst>
@@ -37867,7 +40010,7 @@
                                     </p:set>
                                     <p:animEffect transition="in" filter="wipe(down)">
                                       <p:cBhvr>
-                                        <p:cTn id="35" dur="500"/>
+                                        <p:cTn id="43" dur="500"/>
                                         <p:tgtEl>
                                           <p:spTgt spid="15"/>
                                         </p:tgtEl>
@@ -37883,26 +40026,26 @@
                     </p:cTn>
                   </p:par>
                   <p:par>
-                    <p:cTn id="36" fill="hold">
+                    <p:cTn id="44" fill="hold">
                       <p:stCondLst>
                         <p:cond delay="indefinite"/>
                       </p:stCondLst>
                       <p:childTnLst>
                         <p:par>
-                          <p:cTn id="37" fill="hold">
+                          <p:cTn id="45" fill="hold">
                             <p:stCondLst>
                               <p:cond delay="0"/>
                             </p:stCondLst>
                             <p:childTnLst>
                               <p:par>
-                                <p:cTn id="38" presetID="22" presetClass="entr" presetSubtype="4" fill="hold" grpId="0" nodeType="clickEffect">
+                                <p:cTn id="46" presetID="22" presetClass="entr" presetSubtype="4" fill="hold" grpId="0" nodeType="clickEffect">
                                   <p:stCondLst>
                                     <p:cond delay="0"/>
                                   </p:stCondLst>
                                   <p:childTnLst>
                                     <p:set>
                                       <p:cBhvr>
-                                        <p:cTn id="39" dur="1" fill="hold">
+                                        <p:cTn id="47" dur="1" fill="hold">
                                           <p:stCondLst>
                                             <p:cond delay="0"/>
                                           </p:stCondLst>
@@ -37920,7 +40063,7 @@
                                     </p:set>
                                     <p:animEffect transition="in" filter="wipe(down)">
                                       <p:cBhvr>
-                                        <p:cTn id="40" dur="500"/>
+                                        <p:cTn id="48" dur="500"/>
                                         <p:tgtEl>
                                           <p:spTgt spid="16"/>
                                         </p:tgtEl>
@@ -37963,6 +40106,10 @@
       <p:bldP spid="38917" grpId="0" animBg="1"/>
       <p:bldP spid="15" grpId="0"/>
       <p:bldP spid="16" grpId="0" animBg="1"/>
+      <p:bldP spid="38914" grpId="0"/>
+      <p:bldP spid="38914" grpId="1"/>
+      <p:bldP spid="38916" grpId="0"/>
+      <p:bldP spid="38916" grpId="1"/>
     </p:bldLst>
   </p:timing>
 </p:sld>
@@ -38091,7 +40238,7 @@
   <p:tag name="KSO_WM_DIAGRAM_MAX_ITEMCNT" val="6"/>
   <p:tag name="KSO_WM_DIAGRAM_MIN_ITEMCNT" val="2"/>
   <p:tag name="KSO_WM_DIAGRAM_VERSION" val="3"/>
-  <p:tag name="KSO_WM_DIAGRAM_VIRTUALLY_FRAME" val="{&quot;height&quot;:292.06243896484375,&quot;width&quot;:835.1493530273438}"/>
+  <p:tag name="KSO_WM_DIAGRAM_VIRTUALLY_FRAME" val="{&quot;height&quot;:292.0624389648437,&quot;left&quot;:62.92524474617058,&quot;top&quot;:161.3872057144285,&quot;width&quot;:835.1493530273438}"/>
   <p:tag name="KSO_WM_TAG_VERSION" val="3.0"/>
   <p:tag name="KSO_WM_TEMPLATE_CATEGORY" val="custom"/>
   <p:tag name="KSO_WM_TEMPLATE_INDEX" val="20236725"/>
@@ -38119,7 +40266,7 @@
   <p:tag name="KSO_WM_DIAGRAM_MAX_ITEMCNT" val="6"/>
   <p:tag name="KSO_WM_DIAGRAM_MIN_ITEMCNT" val="2"/>
   <p:tag name="KSO_WM_DIAGRAM_VERSION" val="3"/>
-  <p:tag name="KSO_WM_DIAGRAM_VIRTUALLY_FRAME" val="{&quot;height&quot;:292.06243896484375,&quot;width&quot;:835.1493530273438}"/>
+  <p:tag name="KSO_WM_DIAGRAM_VIRTUALLY_FRAME" val="{&quot;height&quot;:292.0624389648437,&quot;left&quot;:62.92524474617058,&quot;top&quot;:161.3872057144285,&quot;width&quot;:835.1493530273438}"/>
   <p:tag name="KSO_WM_TAG_VERSION" val="3.0"/>
   <p:tag name="KSO_WM_TEMPLATE_CATEGORY" val="custom"/>
   <p:tag name="KSO_WM_TEMPLATE_INDEX" val="20236725"/>
@@ -38147,7 +40294,7 @@
   <p:tag name="KSO_WM_DIAGRAM_MAX_ITEMCNT" val="6"/>
   <p:tag name="KSO_WM_DIAGRAM_MIN_ITEMCNT" val="2"/>
   <p:tag name="KSO_WM_DIAGRAM_VERSION" val="3"/>
-  <p:tag name="KSO_WM_DIAGRAM_VIRTUALLY_FRAME" val="{&quot;height&quot;:292.06243896484375,&quot;width&quot;:835.1493530273438}"/>
+  <p:tag name="KSO_WM_DIAGRAM_VIRTUALLY_FRAME" val="{&quot;height&quot;:292.0624389648437,&quot;left&quot;:62.92524474617058,&quot;top&quot;:161.3872057144285,&quot;width&quot;:835.1493530273438}"/>
   <p:tag name="KSO_WM_TAG_VERSION" val="3.0"/>
   <p:tag name="KSO_WM_TEMPLATE_CATEGORY" val="custom"/>
   <p:tag name="KSO_WM_TEMPLATE_INDEX" val="20236725"/>
@@ -38176,7 +40323,7 @@
   <p:tag name="KSO_WM_DIAGRAM_MAX_ITEMCNT" val="6"/>
   <p:tag name="KSO_WM_DIAGRAM_MIN_ITEMCNT" val="2"/>
   <p:tag name="KSO_WM_DIAGRAM_VERSION" val="3"/>
-  <p:tag name="KSO_WM_DIAGRAM_VIRTUALLY_FRAME" val="{&quot;height&quot;:292.06243896484375,&quot;width&quot;:835.1493530273438}"/>
+  <p:tag name="KSO_WM_DIAGRAM_VIRTUALLY_FRAME" val="{&quot;height&quot;:292.0624389648437,&quot;left&quot;:62.92524474617058,&quot;top&quot;:161.3872057144285,&quot;width&quot;:835.1493530273438}"/>
   <p:tag name="KSO_WM_TAG_VERSION" val="3.0"/>
   <p:tag name="KSO_WM_TEMPLATE_CATEGORY" val="custom"/>
   <p:tag name="KSO_WM_TEMPLATE_INDEX" val="20236725"/>
@@ -38208,7 +40355,7 @@
   <p:tag name="KSO_WM_DIAGRAM_MAX_ITEMCNT" val="6"/>
   <p:tag name="KSO_WM_DIAGRAM_MIN_ITEMCNT" val="2"/>
   <p:tag name="KSO_WM_DIAGRAM_VERSION" val="3"/>
-  <p:tag name="KSO_WM_DIAGRAM_VIRTUALLY_FRAME" val="{&quot;height&quot;:292.06243896484375,&quot;width&quot;:835.1493530273438}"/>
+  <p:tag name="KSO_WM_DIAGRAM_VIRTUALLY_FRAME" val="{&quot;height&quot;:292.0624389648437,&quot;left&quot;:62.92524474617058,&quot;top&quot;:161.3872057144285,&quot;width&quot;:835.1493530273438}"/>
   <p:tag name="KSO_WM_TAG_VERSION" val="3.0"/>
   <p:tag name="KSO_WM_TEMPLATE_CATEGORY" val="custom"/>
   <p:tag name="KSO_WM_TEMPLATE_INDEX" val="20236725"/>
@@ -38237,7 +40384,7 @@
   <p:tag name="KSO_WM_DIAGRAM_MAX_ITEMCNT" val="6"/>
   <p:tag name="KSO_WM_DIAGRAM_MIN_ITEMCNT" val="2"/>
   <p:tag name="KSO_WM_DIAGRAM_VERSION" val="3"/>
-  <p:tag name="KSO_WM_DIAGRAM_VIRTUALLY_FRAME" val="{&quot;height&quot;:292.06243896484375,&quot;width&quot;:835.1493530273438}"/>
+  <p:tag name="KSO_WM_DIAGRAM_VIRTUALLY_FRAME" val="{&quot;height&quot;:292.0624389648437,&quot;left&quot;:62.92524474617058,&quot;top&quot;:161.3872057144285,&quot;width&quot;:835.1493530273438}"/>
   <p:tag name="KSO_WM_TAG_VERSION" val="3.0"/>
   <p:tag name="KSO_WM_TEMPLATE_CATEGORY" val="custom"/>
   <p:tag name="KSO_WM_TEMPLATE_INDEX" val="20236725"/>
@@ -38290,7 +40437,7 @@
   <p:tag name="KSO_WM_DIAGRAM_MAX_ITEMCNT" val="6"/>
   <p:tag name="KSO_WM_DIAGRAM_MIN_ITEMCNT" val="2"/>
   <p:tag name="KSO_WM_DIAGRAM_VERSION" val="3"/>
-  <p:tag name="KSO_WM_DIAGRAM_VIRTUALLY_FRAME" val="{&quot;height&quot;:292.06243896484375,&quot;width&quot;:835.1493530273438}"/>
+  <p:tag name="KSO_WM_DIAGRAM_VIRTUALLY_FRAME" val="{&quot;height&quot;:292.0624389648437,&quot;left&quot;:62.92524474617058,&quot;top&quot;:161.3872057144285,&quot;width&quot;:835.1493530273438}"/>
   <p:tag name="KSO_WM_TAG_VERSION" val="3.0"/>
   <p:tag name="KSO_WM_TEMPLATE_CATEGORY" val="custom"/>
   <p:tag name="KSO_WM_TEMPLATE_INDEX" val="20236725"/>
@@ -38318,7 +40465,7 @@
   <p:tag name="KSO_WM_DIAGRAM_MAX_ITEMCNT" val="6"/>
   <p:tag name="KSO_WM_DIAGRAM_MIN_ITEMCNT" val="2"/>
   <p:tag name="KSO_WM_DIAGRAM_VERSION" val="3"/>
-  <p:tag name="KSO_WM_DIAGRAM_VIRTUALLY_FRAME" val="{&quot;height&quot;:292.06243896484375,&quot;width&quot;:835.1493530273438}"/>
+  <p:tag name="KSO_WM_DIAGRAM_VIRTUALLY_FRAME" val="{&quot;height&quot;:292.0624389648437,&quot;left&quot;:62.92524474617058,&quot;top&quot;:161.3872057144285,&quot;width&quot;:835.1493530273438}"/>
   <p:tag name="KSO_WM_TAG_VERSION" val="3.0"/>
   <p:tag name="KSO_WM_TEMPLATE_CATEGORY" val="custom"/>
   <p:tag name="KSO_WM_TEMPLATE_INDEX" val="20236725"/>
@@ -38347,7 +40494,7 @@
   <p:tag name="KSO_WM_DIAGRAM_MAX_ITEMCNT" val="6"/>
   <p:tag name="KSO_WM_DIAGRAM_MIN_ITEMCNT" val="2"/>
   <p:tag name="KSO_WM_DIAGRAM_VERSION" val="3"/>
-  <p:tag name="KSO_WM_DIAGRAM_VIRTUALLY_FRAME" val="{&quot;height&quot;:292.06243896484375,&quot;width&quot;:835.1493530273438}"/>
+  <p:tag name="KSO_WM_DIAGRAM_VIRTUALLY_FRAME" val="{&quot;height&quot;:292.0624389648437,&quot;left&quot;:62.92524474617058,&quot;top&quot;:161.3872057144285,&quot;width&quot;:835.1493530273438}"/>
   <p:tag name="KSO_WM_TAG_VERSION" val="3.0"/>
   <p:tag name="KSO_WM_TEMPLATE_CATEGORY" val="custom"/>
   <p:tag name="KSO_WM_TEMPLATE_INDEX" val="20236725"/>
@@ -38379,7 +40526,7 @@
   <p:tag name="KSO_WM_DIAGRAM_MAX_ITEMCNT" val="6"/>
   <p:tag name="KSO_WM_DIAGRAM_MIN_ITEMCNT" val="2"/>
   <p:tag name="KSO_WM_DIAGRAM_VERSION" val="3"/>
-  <p:tag name="KSO_WM_DIAGRAM_VIRTUALLY_FRAME" val="{&quot;height&quot;:292.06243896484375,&quot;width&quot;:835.1493530273438}"/>
+  <p:tag name="KSO_WM_DIAGRAM_VIRTUALLY_FRAME" val="{&quot;height&quot;:292.0624389648437,&quot;left&quot;:62.92524474617058,&quot;top&quot;:161.3872057144285,&quot;width&quot;:835.1493530273438}"/>
   <p:tag name="KSO_WM_TAG_VERSION" val="3.0"/>
   <p:tag name="KSO_WM_TEMPLATE_CATEGORY" val="custom"/>
   <p:tag name="KSO_WM_TEMPLATE_INDEX" val="20236725"/>
@@ -38407,7 +40554,7 @@
   <p:tag name="KSO_WM_DIAGRAM_MAX_ITEMCNT" val="6"/>
   <p:tag name="KSO_WM_DIAGRAM_MIN_ITEMCNT" val="2"/>
   <p:tag name="KSO_WM_DIAGRAM_VERSION" val="3"/>
-  <p:tag name="KSO_WM_DIAGRAM_VIRTUALLY_FRAME" val="{&quot;height&quot;:292.06243896484375,&quot;width&quot;:835.1493530273438}"/>
+  <p:tag name="KSO_WM_DIAGRAM_VIRTUALLY_FRAME" val="{&quot;height&quot;:292.0624389648437,&quot;left&quot;:62.92524474617058,&quot;top&quot;:161.3872057144285,&quot;width&quot;:835.1493530273438}"/>
   <p:tag name="KSO_WM_TAG_VERSION" val="3.0"/>
   <p:tag name="KSO_WM_TEMPLATE_CATEGORY" val="custom"/>
   <p:tag name="KSO_WM_TEMPLATE_INDEX" val="20236725"/>
@@ -38435,7 +40582,7 @@
   <p:tag name="KSO_WM_DIAGRAM_MAX_ITEMCNT" val="6"/>
   <p:tag name="KSO_WM_DIAGRAM_MIN_ITEMCNT" val="2"/>
   <p:tag name="KSO_WM_DIAGRAM_VERSION" val="3"/>
-  <p:tag name="KSO_WM_DIAGRAM_VIRTUALLY_FRAME" val="{&quot;height&quot;:292.06243896484375,&quot;width&quot;:835.1493530273438}"/>
+  <p:tag name="KSO_WM_DIAGRAM_VIRTUALLY_FRAME" val="{&quot;height&quot;:292.0624389648437,&quot;left&quot;:62.92524474617058,&quot;top&quot;:161.3872057144285,&quot;width&quot;:835.1493530273438}"/>
   <p:tag name="KSO_WM_TAG_VERSION" val="3.0"/>
   <p:tag name="KSO_WM_TEMPLATE_CATEGORY" val="custom"/>
   <p:tag name="KSO_WM_TEMPLATE_INDEX" val="20236725"/>
@@ -38464,7 +40611,7 @@
   <p:tag name="KSO_WM_DIAGRAM_MAX_ITEMCNT" val="6"/>
   <p:tag name="KSO_WM_DIAGRAM_MIN_ITEMCNT" val="2"/>
   <p:tag name="KSO_WM_DIAGRAM_VERSION" val="3"/>
-  <p:tag name="KSO_WM_DIAGRAM_VIRTUALLY_FRAME" val="{&quot;height&quot;:292.06243896484375,&quot;width&quot;:835.1493530273438}"/>
+  <p:tag name="KSO_WM_DIAGRAM_VIRTUALLY_FRAME" val="{&quot;height&quot;:292.0624389648437,&quot;left&quot;:62.92524474617058,&quot;top&quot;:161.3872057144285,&quot;width&quot;:835.1493530273438}"/>
   <p:tag name="KSO_WM_TAG_VERSION" val="3.0"/>
   <p:tag name="KSO_WM_TEMPLATE_CATEGORY" val="custom"/>
   <p:tag name="KSO_WM_TEMPLATE_INDEX" val="20236725"/>
@@ -38496,7 +40643,7 @@
   <p:tag name="KSO_WM_DIAGRAM_MAX_ITEMCNT" val="6"/>
   <p:tag name="KSO_WM_DIAGRAM_MIN_ITEMCNT" val="2"/>
   <p:tag name="KSO_WM_DIAGRAM_VERSION" val="3"/>
-  <p:tag name="KSO_WM_DIAGRAM_VIRTUALLY_FRAME" val="{&quot;height&quot;:292.06243896484375,&quot;width&quot;:835.1493530273438}"/>
+  <p:tag name="KSO_WM_DIAGRAM_VIRTUALLY_FRAME" val="{&quot;height&quot;:292.0624389648437,&quot;left&quot;:62.92524474617058,&quot;top&quot;:161.3872057144285,&quot;width&quot;:835.1493530273438}"/>
   <p:tag name="KSO_WM_TAG_VERSION" val="3.0"/>
   <p:tag name="KSO_WM_TEMPLATE_CATEGORY" val="custom"/>
   <p:tag name="KSO_WM_TEMPLATE_INDEX" val="20236725"/>
@@ -38525,7 +40672,7 @@
   <p:tag name="KSO_WM_DIAGRAM_MAX_ITEMCNT" val="6"/>
   <p:tag name="KSO_WM_DIAGRAM_MIN_ITEMCNT" val="2"/>
   <p:tag name="KSO_WM_DIAGRAM_VERSION" val="3"/>
-  <p:tag name="KSO_WM_DIAGRAM_VIRTUALLY_FRAME" val="{&quot;height&quot;:292.06243896484375,&quot;width&quot;:835.1493530273438}"/>
+  <p:tag name="KSO_WM_DIAGRAM_VIRTUALLY_FRAME" val="{&quot;height&quot;:292.0624389648437,&quot;left&quot;:62.92524474617058,&quot;top&quot;:161.3872057144285,&quot;width&quot;:835.1493530273438}"/>
   <p:tag name="KSO_WM_TAG_VERSION" val="3.0"/>
   <p:tag name="KSO_WM_TEMPLATE_CATEGORY" val="custom"/>
   <p:tag name="KSO_WM_TEMPLATE_INDEX" val="20236725"/>
@@ -38557,7 +40704,7 @@
   <p:tag name="KSO_WM_DIAGRAM_MAX_ITEMCNT" val="6"/>
   <p:tag name="KSO_WM_DIAGRAM_MIN_ITEMCNT" val="2"/>
   <p:tag name="KSO_WM_DIAGRAM_VERSION" val="3"/>
-  <p:tag name="KSO_WM_DIAGRAM_VIRTUALLY_FRAME" val="{&quot;height&quot;:292.06243896484375,&quot;width&quot;:835.1493530273438}"/>
+  <p:tag name="KSO_WM_DIAGRAM_VIRTUALLY_FRAME" val="{&quot;height&quot;:292.0624389648437,&quot;left&quot;:62.92524474617058,&quot;top&quot;:161.3872057144285,&quot;width&quot;:835.1493530273438}"/>
   <p:tag name="KSO_WM_TAG_VERSION" val="3.0"/>
   <p:tag name="KSO_WM_TEMPLATE_CATEGORY" val="custom"/>
   <p:tag name="KSO_WM_TEMPLATE_INDEX" val="20236725"/>
@@ -38606,7 +40753,7 @@
   <p:tag name="KSO_WM_DIAGRAM_MAX_ITEMCNT" val="6"/>
   <p:tag name="KSO_WM_DIAGRAM_MIN_ITEMCNT" val="2"/>
   <p:tag name="KSO_WM_DIAGRAM_VERSION" val="3"/>
-  <p:tag name="KSO_WM_DIAGRAM_VIRTUALLY_FRAME" val="{&quot;height&quot;:292.06243896484375,&quot;width&quot;:835.1493530273438}"/>
+  <p:tag name="KSO_WM_DIAGRAM_VIRTUALLY_FRAME" val="{&quot;height&quot;:292.0624389648437,&quot;left&quot;:62.92524474617058,&quot;top&quot;:161.3872057144285,&quot;width&quot;:835.1493530273438}"/>
   <p:tag name="KSO_WM_TAG_VERSION" val="3.0"/>
   <p:tag name="KSO_WM_TEMPLATE_CATEGORY" val="custom"/>
   <p:tag name="KSO_WM_TEMPLATE_INDEX" val="20236725"/>
@@ -38635,7 +40782,7 @@
   <p:tag name="KSO_WM_DIAGRAM_MAX_ITEMCNT" val="6"/>
   <p:tag name="KSO_WM_DIAGRAM_MIN_ITEMCNT" val="2"/>
   <p:tag name="KSO_WM_DIAGRAM_VERSION" val="3"/>
-  <p:tag name="KSO_WM_DIAGRAM_VIRTUALLY_FRAME" val="{&quot;height&quot;:292.06243896484375,&quot;width&quot;:835.1493530273438}"/>
+  <p:tag name="KSO_WM_DIAGRAM_VIRTUALLY_FRAME" val="{&quot;height&quot;:292.0624389648437,&quot;left&quot;:62.92524474617058,&quot;top&quot;:161.3872057144285,&quot;width&quot;:835.1493530273438}"/>
   <p:tag name="KSO_WM_TAG_VERSION" val="3.0"/>
   <p:tag name="KSO_WM_TEMPLATE_CATEGORY" val="custom"/>
   <p:tag name="KSO_WM_TEMPLATE_INDEX" val="20236725"/>
